--- a/Topic_B/Exam_Practice/TB-L08_Speaking_Workshop_Hobbies_Sport_and_Free_Time.pptx
+++ b/Topic_B/Exam_Practice/TB-L08_Speaking_Workshop_Hobbies_Sport_and_Free_Time.pptx
@@ -615,7 +615,11 @@
           <a:lstStyle/>
           <a:p>
             <a:r>
-              <a:rPr lang="en-US" dirty="0"/>
+              <a:rPr lang="ar-SA" dirty="0">
+                <a:latin typeface="Amiri" pitchFamily="2" charset="-78"/>
+                <a:ea typeface="Amiri" pitchFamily="2" charset="-78"/>
+                <a:cs typeface="Amiri" pitchFamily="2" charset="-78"/>
+              </a:rPr>
               <a:t>ROLE PLAY C (Develop) — too busy?.
 SET-UP IN THE BREAKOUT ROOM: A = examiner (reads the left column ONLY — the questions, in order), B = candidate (sees the task column; Core may use the help column), C = observer (ticks the feedback checklist). 1 minute preparation, about 3 minutes speaking, 1 minute feedback, then rotate.
 Task ! is the unexpected question: in the exam the candidate has not seen it — the examiner should read it without warning.
@@ -707,7 +711,11 @@
           <a:lstStyle/>
           <a:p>
             <a:r>
-              <a:rPr lang="en-US" dirty="0"/>
+              <a:rPr lang="ar-SA" dirty="0">
+                <a:latin typeface="Amiri" pitchFamily="2" charset="-78"/>
+                <a:ea typeface="Amiri" pitchFamily="2" charset="-78"/>
+                <a:cs typeface="Amiri" pitchFamily="2" charset="-78"/>
+              </a:rPr>
               <a:t>ROLE PLAY D (Stretch) — a debate.
 SET-UP IN THE BREAKOUT ROOM: A = examiner (reads the left column ONLY — the questions, in order), B = candidate (sees the task column; Core may use the help column), C = observer (ticks the feedback checklist). 1 minute preparation, about 3 minutes speaking, 1 minute feedback, then rotate.
 Task ! is the unexpected question: in the exam the candidate has not seen it — the examiner should read it without warning.
@@ -1243,7 +1251,11 @@
           <a:lstStyle/>
           <a:p>
             <a:r>
-              <a:rPr lang="en-US" dirty="0"/>
+              <a:rPr lang="ar-SA" dirty="0">
+                <a:latin typeface="Amiri" pitchFamily="2" charset="-78"/>
+                <a:ea typeface="Amiri" pitchFamily="2" charset="-78"/>
+                <a:cs typeface="Amiri" pitchFamily="2" charset="-78"/>
+              </a:rPr>
               <a:t>TOPIC CONVERSATION — Core. Examiner asks the questions in order and may add “لِمَاذَا؟ / هَلْ يُمْكِنُ أَنْ تَشْرَحَ أَكْثَرَ؟” to push for more. Candidate aims for one full sentence per question.
 </a:t>
             </a:r>
@@ -1332,7 +1344,11 @@
           <a:lstStyle/>
           <a:p>
             <a:r>
-              <a:rPr lang="en-US" dirty="0"/>
+              <a:rPr lang="ar-SA" dirty="0">
+                <a:latin typeface="Amiri" pitchFamily="2" charset="-78"/>
+                <a:ea typeface="Amiri" pitchFamily="2" charset="-78"/>
+                <a:cs typeface="Amiri" pitchFamily="2" charset="-78"/>
+              </a:rPr>
               <a:t>TOPIC CONVERSATION — Develop. Examiner asks the questions in order and may add “لِمَاذَا؟ / هَلْ يُمْكِنُ أَنْ تَشْرَحَ أَكْثَرَ؟” to push for more. Candidate aims for two or three sentences, with a reason or a past detail.
 </a:t>
             </a:r>
@@ -1421,7 +1437,11 @@
           <a:lstStyle/>
           <a:p>
             <a:r>
-              <a:rPr lang="en-US" dirty="0"/>
+              <a:rPr lang="ar-SA" dirty="0">
+                <a:latin typeface="Amiri" pitchFamily="2" charset="-78"/>
+                <a:ea typeface="Amiri" pitchFamily="2" charset="-78"/>
+                <a:cs typeface="Amiri" pitchFamily="2" charset="-78"/>
+              </a:rPr>
               <a:t>TOPIC CONVERSATION — Stretch. Examiner asks the questions in order and may add “لِمَاذَا؟ / هَلْ يُمْكِنُ أَنْ تَشْرَحَ أَكْثَرَ؟” to push for more. Candidate aims for a developed answer: opinion, comparison, concession and a conditional.
 </a:t>
             </a:r>
@@ -1510,7 +1530,11 @@
           <a:lstStyle/>
           <a:p>
             <a:r>
-              <a:rPr lang="en-US" dirty="0"/>
+              <a:rPr lang="ar-SA" dirty="0">
+                <a:latin typeface="Amiri" pitchFamily="2" charset="-78"/>
+                <a:ea typeface="Amiri" pitchFamily="2" charset="-78"/>
+                <a:cs typeface="Amiri" pitchFamily="2" charset="-78"/>
+              </a:rPr>
               <a:t>WELCOME (1 min) — while students join.
 • Greet each student by name as they arrive: السَّلَامُ عَلَيْكُمْ. Take the register (Pastoral Tracker: attendance 0/1).
 • 2-MINUTE CHECK-IN (SEND training): a private chat to any student who seemed unsettled last lesson — “Are you okay today? 👍 / 👎”.
@@ -2224,7 +2248,11 @@
           <a:lstStyle/>
           <a:p>
             <a:r>
-              <a:rPr lang="en-US" dirty="0"/>
+              <a:rPr lang="ar-SA" dirty="0">
+                <a:latin typeface="Amiri" pitchFamily="2" charset="-78"/>
+                <a:ea typeface="Amiri" pitchFamily="2" charset="-78"/>
+                <a:cs typeface="Amiri" pitchFamily="2" charset="-78"/>
+              </a:rPr>
               <a:t>TEACH (3 min). Role play = precise and complete; conversation = develop. Choral repetition of the repair phrases. To a girl: تُعِيدِي.</a:t>
             </a:r>
             <a:endParaRPr lang="en-US" dirty="0"/>
@@ -2312,7 +2340,11 @@
           <a:lstStyle/>
           <a:p>
             <a:r>
-              <a:rPr lang="en-US" dirty="0"/>
+              <a:rPr lang="ar-SA" dirty="0">
+                <a:latin typeface="Amiri" pitchFamily="2" charset="-78"/>
+                <a:ea typeface="Amiri" pitchFamily="2" charset="-78"/>
+                <a:cs typeface="Amiri" pitchFamily="2" charset="-78"/>
+              </a:rPr>
               <a:t>LANGUAGE BANK (2 min) — a verb OR a verbal noun: أَسْبَحُ (I swim) · أُحِبُّ السِّبَاحَةَ (I like swimming). After أَسْتَطِيعُ أَنْ the verb ends in -a: أَسْتَطِيعُ أَنْ أَعْزِفَ.</a:t>
             </a:r>
             <a:endParaRPr lang="en-US" dirty="0"/>
@@ -2400,7 +2432,11 @@
           <a:lstStyle/>
           <a:p>
             <a:r>
-              <a:rPr lang="en-US" dirty="0"/>
+              <a:rPr lang="ar-SA" dirty="0">
+                <a:latin typeface="Amiri" pitchFamily="2" charset="-78"/>
+                <a:ea typeface="Amiri" pitchFamily="2" charset="-78"/>
+                <a:cs typeface="Amiri" pitchFamily="2" charset="-78"/>
+              </a:rPr>
               <a:t>LANGUAGE BANK (2 min) — frequency: دَائِمًا · غَالِبًا · أَحْيَانًا · نَادِرًا · لَا … أَبَدًا. Numbers of times: مَرَّةً · مَرَّتَيْنِ · ثَلَاثَ مَرَّاتٍ. نَادٍ → النَّادِي (al- restores the yāʾ).</a:t>
             </a:r>
             <a:endParaRPr lang="en-US" dirty="0"/>
@@ -2576,7 +2612,11 @@
           <a:lstStyle/>
           <a:p>
             <a:r>
-              <a:rPr lang="en-US" dirty="0"/>
+              <a:rPr lang="ar-SA" dirty="0">
+                <a:latin typeface="Amiri" pitchFamily="2" charset="-78"/>
+                <a:ea typeface="Amiri" pitchFamily="2" charset="-78"/>
+                <a:cs typeface="Amiri" pitchFamily="2" charset="-78"/>
+              </a:rPr>
               <a:t>ROLE PLAY A (Core) — joining a sports centre.
 SET-UP IN THE BREAKOUT ROOM: A = examiner (reads the left column ONLY — the questions, in order), B = candidate (sees the task column; Core may use the help column), C = observer (ticks the feedback checklist). 1 minute preparation, about 3 minutes speaking, 1 minute feedback, then rotate.
 Task ! is the unexpected question: in the exam the candidate has not seen it — the examiner should read it without warning.
@@ -2668,7 +2708,11 @@
           <a:lstStyle/>
           <a:p>
             <a:r>
-              <a:rPr lang="en-US" dirty="0"/>
+              <a:rPr lang="ar-SA" dirty="0">
+                <a:latin typeface="Amiri" pitchFamily="2" charset="-78"/>
+                <a:ea typeface="Amiri" pitchFamily="2" charset="-78"/>
+                <a:cs typeface="Amiri" pitchFamily="2" charset="-78"/>
+              </a:rPr>
               <a:t>ROLE PLAY B (Core+) — a new friend.
 SET-UP IN THE BREAKOUT ROOM: A = examiner (reads the left column ONLY — the questions, in order), B = candidate (sees the task column; Core may use the help column), C = observer (ticks the feedback checklist). 1 minute preparation, about 3 minutes speaking, 1 minute feedback, then rotate.
 Task ! is the unexpected question: in the exam the candidate has not seen it — the examiner should read it without warning.
@@ -3156,6 +3200,7 @@
                   <a:srgbClr val="D4AF37"/>
                 </a:solidFill>
                 <a:latin typeface="Amiri" pitchFamily="2" charset="-78"/>
+                <a:ea typeface="Amiri" pitchFamily="2" charset="-78"/>
                 <a:cs typeface="Amiri" pitchFamily="2" charset="-78"/>
               </a:rPr>
               <a:t>م</a:t>
@@ -3362,6 +3407,7 @@
                   <a:srgbClr val="D4AF37"/>
                 </a:solidFill>
                 <a:latin typeface="Amiri" pitchFamily="2" charset="-78"/>
+                <a:ea typeface="Amiri" pitchFamily="2" charset="-78"/>
                 <a:cs typeface="Amiri" pitchFamily="2" charset="-78"/>
               </a:rPr>
               <a:t>وَرْشَةُ التَّحَدُّثِ — الهِوَايَاتُ وَوَقْتُ الفَرَاغِ</a:t>
@@ -3819,6 +3865,7 @@
                   <a:srgbClr val="D4AF37"/>
                 </a:solidFill>
                 <a:latin typeface="Amiri" pitchFamily="2" charset="-78"/>
+                <a:ea typeface="Amiri" pitchFamily="2" charset="-78"/>
                 <a:cs typeface="Amiri" pitchFamily="2" charset="-78"/>
               </a:rPr>
               <a:t>م</a:t>
@@ -4139,6 +4186,7 @@
                   <a:srgbClr val="8A6D1E"/>
                 </a:solidFill>
                 <a:latin typeface="Amiri" pitchFamily="2" charset="-78"/>
+                <a:ea typeface="Amiri" pitchFamily="2" charset="-78"/>
                 <a:cs typeface="Amiri" pitchFamily="2" charset="-78"/>
               </a:rPr>
               <a:t>أَنْشِطَةٌ كَثِيرَةٌ</a:t>
@@ -4419,6 +4467,7 @@
                   <a:srgbClr val="1B3B6F"/>
                 </a:solidFill>
                 <a:latin typeface="Amiri" pitchFamily="2" charset="-78"/>
+                <a:ea typeface="Amiri" pitchFamily="2" charset="-78"/>
                 <a:cs typeface="Amiri" pitchFamily="2" charset="-78"/>
               </a:rPr>
               <a:t>عِنْدِي … يَوْمَ … وَ… يَوْمَ …</a:t>
@@ -4495,6 +4544,7 @@
                   <a:srgbClr val="1B3B6F"/>
                 </a:solidFill>
                 <a:latin typeface="Amiri" pitchFamily="2" charset="-78"/>
+                <a:ea typeface="Amiri" pitchFamily="2" charset="-78"/>
                 <a:cs typeface="Amiri" pitchFamily="2" charset="-78"/>
               </a:rPr>
               <a:t>تَبْدُو مُتْعَبًا. مَا بِكَ؟</a:t>
@@ -4598,6 +4648,7 @@
                   <a:srgbClr val="1B3B6F"/>
                 </a:solidFill>
                 <a:latin typeface="Amiri" pitchFamily="2" charset="-78"/>
+                <a:ea typeface="Amiri" pitchFamily="2" charset="-78"/>
                 <a:cs typeface="Amiri" pitchFamily="2" charset="-78"/>
               </a:rPr>
               <a:t>أَدْرُسُ … لٰكِنِّي …</a:t>
@@ -4674,6 +4725,7 @@
                   <a:srgbClr val="1B3B6F"/>
                 </a:solidFill>
                 <a:latin typeface="Amiri" pitchFamily="2" charset="-78"/>
+                <a:ea typeface="Amiri" pitchFamily="2" charset="-78"/>
                 <a:cs typeface="Amiri" pitchFamily="2" charset="-78"/>
               </a:rPr>
               <a:t>وَمَتَى تَدْرُسُ؟</a:t>
@@ -4777,6 +4829,7 @@
                   <a:srgbClr val="1B3B6F"/>
                 </a:solidFill>
                 <a:latin typeface="Amiri" pitchFamily="2" charset="-78"/>
+                <a:ea typeface="Amiri" pitchFamily="2" charset="-78"/>
                 <a:cs typeface="Amiri" pitchFamily="2" charset="-78"/>
               </a:rPr>
               <a:t>كُرَةُ القَدَمِ، لِأَنَّهَا … وَلِأَنَّ …</a:t>
@@ -4853,6 +4906,7 @@
                   <a:srgbClr val="1B3B6F"/>
                 </a:solidFill>
                 <a:latin typeface="Amiri" pitchFamily="2" charset="-78"/>
+                <a:ea typeface="Amiri" pitchFamily="2" charset="-78"/>
                 <a:cs typeface="Amiri" pitchFamily="2" charset="-78"/>
               </a:rPr>
               <a:t>أَيُّ نَشَاطٍ أَهَمُّ لَكَ؟</a:t>
@@ -4956,6 +5010,7 @@
                   <a:srgbClr val="1B3B6F"/>
                 </a:solidFill>
                 <a:latin typeface="Amiri" pitchFamily="2" charset="-78"/>
+                <a:ea typeface="Amiri" pitchFamily="2" charset="-78"/>
                 <a:cs typeface="Amiri" pitchFamily="2" charset="-78"/>
               </a:rPr>
               <a:t>أَيَّ نَشَاطٍ تَنْصَحُنِي أَنْ …؟</a:t>
@@ -5032,6 +5087,7 @@
                   <a:srgbClr val="1B3B6F"/>
                 </a:solidFill>
                 <a:latin typeface="Amiri" pitchFamily="2" charset="-78"/>
+                <a:ea typeface="Amiri" pitchFamily="2" charset="-78"/>
                 <a:cs typeface="Amiri" pitchFamily="2" charset="-78"/>
               </a:rPr>
               <a:t>رُبَّمَا يَجِبُ أَنْ تَتْرُكَ نَشَاطًا.</a:t>
@@ -5135,6 +5191,7 @@
                   <a:srgbClr val="1B3B6F"/>
                 </a:solidFill>
                 <a:latin typeface="Amiri" pitchFamily="2" charset="-78"/>
+                <a:ea typeface="Amiri" pitchFamily="2" charset="-78"/>
                 <a:cs typeface="Amiri" pitchFamily="2" charset="-78"/>
               </a:rPr>
               <a:t>كُنْتُ … كُلَّ يَوْمٍ</a:t>
@@ -5211,6 +5268,7 @@
                   <a:srgbClr val="1B3B6F"/>
                 </a:solidFill>
                 <a:latin typeface="Amiri" pitchFamily="2" charset="-78"/>
+                <a:ea typeface="Amiri" pitchFamily="2" charset="-78"/>
                 <a:cs typeface="Amiri" pitchFamily="2" charset="-78"/>
               </a:rPr>
               <a:t>كَيْفَ كَانَ وَقْتُ فَرَاغِكَ عِنْدَمَا كُنْتَ صَغِيرًا؟</a:t>
@@ -5420,6 +5478,7 @@
                   <a:srgbClr val="D4AF37"/>
                 </a:solidFill>
                 <a:latin typeface="Amiri" pitchFamily="2" charset="-78"/>
+                <a:ea typeface="Amiri" pitchFamily="2" charset="-78"/>
                 <a:cs typeface="Amiri" pitchFamily="2" charset="-78"/>
               </a:rPr>
               <a:t>م</a:t>
@@ -5740,6 +5799,7 @@
                   <a:srgbClr val="8A6D1E"/>
                 </a:solidFill>
                 <a:latin typeface="Amiri" pitchFamily="2" charset="-78"/>
+                <a:ea typeface="Amiri" pitchFamily="2" charset="-78"/>
                 <a:cs typeface="Amiri" pitchFamily="2" charset="-78"/>
               </a:rPr>
               <a:t>الشَّاشَاتُ أَمِ الرِّيَاضَةُ؟</a:t>
@@ -6020,6 +6080,7 @@
                   <a:srgbClr val="1B3B6F"/>
                 </a:solidFill>
                 <a:latin typeface="Amiri" pitchFamily="2" charset="-78"/>
+                <a:ea typeface="Amiri" pitchFamily="2" charset="-78"/>
                 <a:cs typeface="Amiri" pitchFamily="2" charset="-78"/>
               </a:rPr>
               <a:t>يَقْضِي أَغْلَبُهُمْ … مِثْلًا …</a:t>
@@ -6096,6 +6157,7 @@
                   <a:srgbClr val="1B3B6F"/>
                 </a:solidFill>
                 <a:latin typeface="Amiri" pitchFamily="2" charset="-78"/>
+                <a:ea typeface="Amiri" pitchFamily="2" charset="-78"/>
                 <a:cs typeface="Amiri" pitchFamily="2" charset="-78"/>
               </a:rPr>
               <a:t>كَيْفَ يَقْضِي الشَّبَابُ وَقْتَ فَرَاغِهِمْ اليَوْمَ؟</a:t>
@@ -6199,6 +6261,7 @@
                   <a:srgbClr val="1B3B6F"/>
                 </a:solidFill>
                 <a:latin typeface="Amiri" pitchFamily="2" charset="-78"/>
+                <a:ea typeface="Amiri" pitchFamily="2" charset="-78"/>
                 <a:cs typeface="Amiri" pitchFamily="2" charset="-78"/>
               </a:rPr>
               <a:t>لَيْسَتْ دَائِمًا … فَبَعْضُهَا … لٰكِنَّ …</a:t>
@@ -6275,6 +6338,7 @@
                   <a:srgbClr val="1B3B6F"/>
                 </a:solidFill>
                 <a:latin typeface="Amiri" pitchFamily="2" charset="-78"/>
+                <a:ea typeface="Amiri" pitchFamily="2" charset="-78"/>
                 <a:cs typeface="Amiri" pitchFamily="2" charset="-78"/>
               </a:rPr>
               <a:t>هَلْ أَلْعَابُ الفِيدْيُو مُضِرَّةٌ دَائِمًا؟</a:t>
@@ -6378,6 +6442,7 @@
                   <a:srgbClr val="1B3B6F"/>
                 </a:solidFill>
                 <a:latin typeface="Amiri" pitchFamily="2" charset="-78"/>
+                <a:ea typeface="Amiri" pitchFamily="2" charset="-78"/>
                 <a:cs typeface="Amiri" pitchFamily="2" charset="-78"/>
               </a:rPr>
               <a:t>كَانُوا … أَمَّا اليَوْمَ فَيَجْلِسُونَ …</a:t>
@@ -6454,6 +6519,7 @@
                   <a:srgbClr val="1B3B6F"/>
                 </a:solidFill>
                 <a:latin typeface="Amiri" pitchFamily="2" charset="-78"/>
+                <a:ea typeface="Amiri" pitchFamily="2" charset="-78"/>
                 <a:cs typeface="Amiri" pitchFamily="2" charset="-78"/>
               </a:rPr>
               <a:t>كَيْفَ كَانَ الشَّبَابُ يَقْضُونَ وَقْتَهُمْ فِي المَاضِي؟</a:t>
@@ -6557,6 +6623,7 @@
                   <a:srgbClr val="1B3B6F"/>
                 </a:solidFill>
                 <a:latin typeface="Amiri" pitchFamily="2" charset="-78"/>
+                <a:ea typeface="Amiri" pitchFamily="2" charset="-78"/>
                 <a:cs typeface="Amiri" pitchFamily="2" charset="-78"/>
               </a:rPr>
               <a:t>صَحِيحٌ أَنَّ … غَيْرَ أَنَّ …</a:t>
@@ -6633,6 +6700,7 @@
                   <a:srgbClr val="1B3B6F"/>
                 </a:solidFill>
                 <a:latin typeface="Amiri" pitchFamily="2" charset="-78"/>
+                <a:ea typeface="Amiri" pitchFamily="2" charset="-78"/>
                 <a:cs typeface="Amiri" pitchFamily="2" charset="-78"/>
               </a:rPr>
               <a:t>لٰكِنَّ الأَلْعَابَ الإِلِكْتِرُونِيَّةَ اجْتِمَاعِيَّةٌ أَيْضًا!</a:t>
@@ -6736,6 +6804,7 @@
                   <a:srgbClr val="1B3B6F"/>
                 </a:solidFill>
                 <a:latin typeface="Amiri" pitchFamily="2" charset="-78"/>
+                <a:ea typeface="Amiri" pitchFamily="2" charset="-78"/>
                 <a:cs typeface="Amiri" pitchFamily="2" charset="-78"/>
               </a:rPr>
               <a:t>لَوْ كَانَ عِنْدِي …، لَتَسَلَّقْتُ …</a:t>
@@ -6812,6 +6881,7 @@
                   <a:srgbClr val="1B3B6F"/>
                 </a:solidFill>
                 <a:latin typeface="Amiri" pitchFamily="2" charset="-78"/>
+                <a:ea typeface="Amiri" pitchFamily="2" charset="-78"/>
                 <a:cs typeface="Amiri" pitchFamily="2" charset="-78"/>
               </a:rPr>
               <a:t>لَوْ كَانَ عِنْدَكَ يَوْمٌ حُرٌّ تَمَامًا، كَيْفَ تَقْضِيهِ؟</a:t>
@@ -7021,6 +7091,7 @@
                   <a:srgbClr val="D4AF37"/>
                 </a:solidFill>
                 <a:latin typeface="Amiri" pitchFamily="2" charset="-78"/>
+                <a:ea typeface="Amiri" pitchFamily="2" charset="-78"/>
                 <a:cs typeface="Amiri" pitchFamily="2" charset="-78"/>
               </a:rPr>
               <a:t>م</a:t>
@@ -7341,6 +7412,7 @@
                   <a:srgbClr val="8A6D1E"/>
                 </a:solidFill>
                 <a:latin typeface="Amiri" pitchFamily="2" charset="-78"/>
+                <a:ea typeface="Amiri" pitchFamily="2" charset="-78"/>
                 <a:cs typeface="Amiri" pitchFamily="2" charset="-78"/>
               </a:rPr>
               <a:t>وَرَقَةُ المُلَاحِظِ</a:t>
@@ -8811,6 +8883,7 @@
                   <a:srgbClr val="D4AF37"/>
                 </a:solidFill>
                 <a:latin typeface="Amiri" pitchFamily="2" charset="-78"/>
+                <a:ea typeface="Amiri" pitchFamily="2" charset="-78"/>
                 <a:cs typeface="Amiri" pitchFamily="2" charset="-78"/>
               </a:rPr>
               <a:t>م</a:t>
@@ -9131,6 +9204,7 @@
                   <a:srgbClr val="8A6D1E"/>
                 </a:solidFill>
                 <a:latin typeface="Amiri" pitchFamily="2" charset="-78"/>
+                <a:ea typeface="Amiri" pitchFamily="2" charset="-78"/>
                 <a:cs typeface="Amiri" pitchFamily="2" charset="-78"/>
               </a:rPr>
               <a:t>نَمُوذَجُ الإِجَابَةِ</a:t>
@@ -9373,6 +9447,7 @@
                   <a:srgbClr val="1B3B6F"/>
                 </a:solidFill>
                 <a:latin typeface="Amiri" pitchFamily="2" charset="-78"/>
+                <a:ea typeface="Amiri" pitchFamily="2" charset="-78"/>
                 <a:cs typeface="Amiri" pitchFamily="2" charset="-78"/>
               </a:rPr>
               <a:t>أُرِيدُ أَنْ أُمَارِسَ السِّبَاحَةَ وَكُرَةَ السَّلَّةِ.</a:t>
@@ -9449,6 +9524,7 @@
                   <a:srgbClr val="1B3B6F"/>
                 </a:solidFill>
                 <a:latin typeface="Amiri" pitchFamily="2" charset="-78"/>
+                <a:ea typeface="Amiri" pitchFamily="2" charset="-78"/>
                 <a:cs typeface="Amiri" pitchFamily="2" charset="-78"/>
               </a:rPr>
               <a:t>أَهْلًا، أَيَّ رِيَاضَةٍ تُرِيدُ أَنْ تُمَارِسَ؟</a:t>
@@ -9552,6 +9628,7 @@
                   <a:srgbClr val="1B3B6F"/>
                 </a:solidFill>
                 <a:latin typeface="Amiri" pitchFamily="2" charset="-78"/>
+                <a:ea typeface="Amiri" pitchFamily="2" charset="-78"/>
                 <a:cs typeface="Amiri" pitchFamily="2" charset="-78"/>
               </a:rPr>
               <a:t>ثَلَاثَ مَرَّاتٍ فِي الأُسْبُوعِ، بَعْدَ المَدْرَسَةِ.</a:t>
@@ -9628,6 +9705,7 @@
                   <a:srgbClr val="1B3B6F"/>
                 </a:solidFill>
                 <a:latin typeface="Amiri" pitchFamily="2" charset="-78"/>
+                <a:ea typeface="Amiri" pitchFamily="2" charset="-78"/>
                 <a:cs typeface="Amiri" pitchFamily="2" charset="-78"/>
               </a:rPr>
               <a:t>كَمْ مَرَّةً فِي الأُسْبُوعِ؟</a:t>
@@ -9731,6 +9809,7 @@
                   <a:srgbClr val="1B3B6F"/>
                 </a:solidFill>
                 <a:latin typeface="Amiri" pitchFamily="2" charset="-78"/>
+                <a:ea typeface="Amiri" pitchFamily="2" charset="-78"/>
                 <a:cs typeface="Amiri" pitchFamily="2" charset="-78"/>
               </a:rPr>
               <a:t>نَعَمْ، أَسْتَطِيعُ أَنْ أَسْبَحَ جَيِّدًا، لٰكِنِّي أُرِيدُ أَنْ أَكُونَ أَسْرَعَ.</a:t>
@@ -9807,6 +9886,7 @@
                   <a:srgbClr val="1B3B6F"/>
                 </a:solidFill>
                 <a:latin typeface="Amiri" pitchFamily="2" charset="-78"/>
+                <a:ea typeface="Amiri" pitchFamily="2" charset="-78"/>
                 <a:cs typeface="Amiri" pitchFamily="2" charset="-78"/>
               </a:rPr>
               <a:t>هَلْ تَسْتَطِيعُ أَنْ تَسْبَحَ جَيِّدًا؟</a:t>
@@ -9910,6 +9990,7 @@
                   <a:srgbClr val="1B3B6F"/>
                 </a:solidFill>
                 <a:latin typeface="Amiri" pitchFamily="2" charset="-78"/>
+                <a:ea typeface="Amiri" pitchFamily="2" charset="-78"/>
                 <a:cs typeface="Amiri" pitchFamily="2" charset="-78"/>
               </a:rPr>
               <a:t>يَوْمَ الإِثْنَيْنِ وَالأَرْبِعَاءِ وَالجُمُعَةِ، فِي السَّاعَةِ الخَامِسَةِ.</a:t>
@@ -9986,6 +10067,7 @@
                   <a:srgbClr val="1B3B6F"/>
                 </a:solidFill>
                 <a:latin typeface="Amiri" pitchFamily="2" charset="-78"/>
+                <a:ea typeface="Amiri" pitchFamily="2" charset="-78"/>
                 <a:cs typeface="Amiri" pitchFamily="2" charset="-78"/>
               </a:rPr>
               <a:t>أَيَّ يَوْمٍ يُنَاسِبُكَ؟</a:t>
@@ -10089,6 +10171,7 @@
                   <a:srgbClr val="1B3B6F"/>
                 </a:solidFill>
                 <a:latin typeface="Amiri" pitchFamily="2" charset="-78"/>
+                <a:ea typeface="Amiri" pitchFamily="2" charset="-78"/>
                 <a:cs typeface="Amiri" pitchFamily="2" charset="-78"/>
               </a:rPr>
               <a:t>لِأَنَّهَا مُفِيدَةٌ لِلصِّحَّةِ، وَمُرِيحَةٌ بَعْدَ يَوْمٍ طَوِيلٍ.</a:t>
@@ -10165,6 +10248,7 @@
                   <a:srgbClr val="1B3B6F"/>
                 </a:solidFill>
                 <a:latin typeface="Amiri" pitchFamily="2" charset="-78"/>
+                <a:ea typeface="Amiri" pitchFamily="2" charset="-78"/>
                 <a:cs typeface="Amiri" pitchFamily="2" charset="-78"/>
               </a:rPr>
               <a:t>لِمَاذَا تُحِبُّ السِّبَاحَةَ؟</a:t>
@@ -10374,6 +10458,7 @@
                   <a:srgbClr val="D4AF37"/>
                 </a:solidFill>
                 <a:latin typeface="Amiri" pitchFamily="2" charset="-78"/>
+                <a:ea typeface="Amiri" pitchFamily="2" charset="-78"/>
                 <a:cs typeface="Amiri" pitchFamily="2" charset="-78"/>
               </a:rPr>
               <a:t>م</a:t>
@@ -10694,6 +10779,7 @@
                   <a:srgbClr val="8A6D1E"/>
                 </a:solidFill>
                 <a:latin typeface="Amiri" pitchFamily="2" charset="-78"/>
+                <a:ea typeface="Amiri" pitchFamily="2" charset="-78"/>
                 <a:cs typeface="Amiri" pitchFamily="2" charset="-78"/>
               </a:rPr>
               <a:t>نَمُوذَجُ الإِجَابَةِ</a:t>
@@ -10936,6 +11022,7 @@
                   <a:srgbClr val="1B3B6F"/>
                 </a:solidFill>
                 <a:latin typeface="Amiri" pitchFamily="2" charset="-78"/>
+                <a:ea typeface="Amiri" pitchFamily="2" charset="-78"/>
                 <a:cs typeface="Amiri" pitchFamily="2" charset="-78"/>
               </a:rPr>
               <a:t>أُحِبُّ القِرَاءَةَ وَالرَّسْمَ، وَأَلْعَبُ كُرَةَ القَدَمِ أَحْيَانًا.</a:t>
@@ -11012,6 +11099,7 @@
                   <a:srgbClr val="1B3B6F"/>
                 </a:solidFill>
                 <a:latin typeface="Amiri" pitchFamily="2" charset="-78"/>
+                <a:ea typeface="Amiri" pitchFamily="2" charset="-78"/>
                 <a:cs typeface="Amiri" pitchFamily="2" charset="-78"/>
               </a:rPr>
               <a:t>مَاذَا تَفْعَلُ فِي وَقْتِ فَرَاغِكَ؟</a:t>
@@ -11115,6 +11203,7 @@
                   <a:srgbClr val="1B3B6F"/>
                 </a:solidFill>
                 <a:latin typeface="Amiri" pitchFamily="2" charset="-78"/>
+                <a:ea typeface="Amiri" pitchFamily="2" charset="-78"/>
                 <a:cs typeface="Amiri" pitchFamily="2" charset="-78"/>
               </a:rPr>
               <a:t>أَقْرَأُ القِصَصَ البُولِيسِيَّةَ، لِأَنَّهَا مُشَوِّقَةٌ.</a:t>
@@ -11191,6 +11280,7 @@
                   <a:srgbClr val="1B3B6F"/>
                 </a:solidFill>
                 <a:latin typeface="Amiri" pitchFamily="2" charset="-78"/>
+                <a:ea typeface="Amiri" pitchFamily="2" charset="-78"/>
                 <a:cs typeface="Amiri" pitchFamily="2" charset="-78"/>
               </a:rPr>
               <a:t>مَاذَا تَقْرَأُ؟</a:t>
@@ -11294,6 +11384,7 @@
                   <a:srgbClr val="1B3B6F"/>
                 </a:solidFill>
                 <a:latin typeface="Amiri" pitchFamily="2" charset="-78"/>
+                <a:ea typeface="Amiri" pitchFamily="2" charset="-78"/>
                 <a:cs typeface="Amiri" pitchFamily="2" charset="-78"/>
               </a:rPr>
               <a:t>أَيْنَ تَلْعَبُهُ؟ وَكَمْ مَرَّةً فِي الأُسْبُوعِ؟</a:t>
@@ -11370,6 +11461,7 @@
                   <a:srgbClr val="1B3B6F"/>
                 </a:solidFill>
                 <a:latin typeface="Amiri" pitchFamily="2" charset="-78"/>
+                <a:ea typeface="Amiri" pitchFamily="2" charset="-78"/>
                 <a:cs typeface="Amiri" pitchFamily="2" charset="-78"/>
               </a:rPr>
               <a:t>… أَنَا أُحِبُّ الشِّطْرَنْجَ كَثِيرًا.</a:t>
@@ -11473,6 +11565,7 @@
                   <a:srgbClr val="1B3B6F"/>
                 </a:solidFill>
                 <a:latin typeface="Amiri" pitchFamily="2" charset="-78"/>
+                <a:ea typeface="Amiri" pitchFamily="2" charset="-78"/>
                 <a:cs typeface="Amiri" pitchFamily="2" charset="-78"/>
               </a:rPr>
               <a:t>نَعَمْ، سَآتِي، لٰكِنِّي لَا أَسْتَطِيعُ أَنْ أَلْعَبَ جَيِّدًا، فَهَلْ تُعَلِّمُنِي؟</a:t>
@@ -11549,6 +11642,7 @@
                   <a:srgbClr val="1B3B6F"/>
                 </a:solidFill>
                 <a:latin typeface="Amiri" pitchFamily="2" charset="-78"/>
+                <a:ea typeface="Amiri" pitchFamily="2" charset="-78"/>
                 <a:cs typeface="Amiri" pitchFamily="2" charset="-78"/>
               </a:rPr>
               <a:t>فِي نَادِي المَدْرَسَةِ، يَوْمَ الخَمِيسِ. هَلْ تَأْتِي؟</a:t>
@@ -11652,6 +11746,7 @@
                   <a:srgbClr val="1B3B6F"/>
                 </a:solidFill>
                 <a:latin typeface="Amiri" pitchFamily="2" charset="-78"/>
+                <a:ea typeface="Amiri" pitchFamily="2" charset="-78"/>
                 <a:cs typeface="Amiri" pitchFamily="2" charset="-78"/>
               </a:rPr>
               <a:t>ذَهَبْتُ إِلَى المَكْتَبَةِ، وَاسْتَعَرْتُ ثَلَاثَةَ كُتُبٍ جَدِيدَةٍ.</a:t>
@@ -11728,6 +11823,7 @@
                   <a:srgbClr val="1B3B6F"/>
                 </a:solidFill>
                 <a:latin typeface="Amiri" pitchFamily="2" charset="-78"/>
+                <a:ea typeface="Amiri" pitchFamily="2" charset="-78"/>
                 <a:cs typeface="Amiri" pitchFamily="2" charset="-78"/>
               </a:rPr>
               <a:t>مَاذَا فَعَلْتَ فِي نِهَايَةِ الأُسْبُوعِ المَاضِي؟</a:t>
@@ -11937,6 +12033,7 @@
                   <a:srgbClr val="D4AF37"/>
                 </a:solidFill>
                 <a:latin typeface="Amiri" pitchFamily="2" charset="-78"/>
+                <a:ea typeface="Amiri" pitchFamily="2" charset="-78"/>
                 <a:cs typeface="Amiri" pitchFamily="2" charset="-78"/>
               </a:rPr>
               <a:t>م</a:t>
@@ -12257,6 +12354,7 @@
                   <a:srgbClr val="8A6D1E"/>
                 </a:solidFill>
                 <a:latin typeface="Amiri" pitchFamily="2" charset="-78"/>
+                <a:ea typeface="Amiri" pitchFamily="2" charset="-78"/>
                 <a:cs typeface="Amiri" pitchFamily="2" charset="-78"/>
               </a:rPr>
               <a:t>نَمُوذَجُ الإِجَابَةِ</a:t>
@@ -12499,6 +12597,7 @@
                   <a:srgbClr val="1B3B6F"/>
                 </a:solidFill>
                 <a:latin typeface="Amiri" pitchFamily="2" charset="-78"/>
+                <a:ea typeface="Amiri" pitchFamily="2" charset="-78"/>
                 <a:cs typeface="Amiri" pitchFamily="2" charset="-78"/>
               </a:rPr>
               <a:t>عِنْدِي تَدْرِيبُ كُرَةِ القَدَمِ يَوْمَ الإِثْنَيْنِ وَالخَمِيسِ، وَدَرْسُ بِيَانُو يَوْمَ الثُّلَاثَاءِ، وَنَادِي العُلُومِ يَوْمَ الأَرْبِعَاءِ.</a:t>
@@ -12575,6 +12674,7 @@
                   <a:srgbClr val="1B3B6F"/>
                 </a:solidFill>
                 <a:latin typeface="Amiri" pitchFamily="2" charset="-78"/>
+                <a:ea typeface="Amiri" pitchFamily="2" charset="-78"/>
                 <a:cs typeface="Amiri" pitchFamily="2" charset="-78"/>
               </a:rPr>
               <a:t>تَبْدُو مُتْعَبًا. مَا بِكَ؟</a:t>
@@ -12678,6 +12778,7 @@
                   <a:srgbClr val="1B3B6F"/>
                 </a:solidFill>
                 <a:latin typeface="Amiri" pitchFamily="2" charset="-78"/>
+                <a:ea typeface="Amiri" pitchFamily="2" charset="-78"/>
                 <a:cs typeface="Amiri" pitchFamily="2" charset="-78"/>
               </a:rPr>
               <a:t>أَدْرُسُ فِي اللَّيْلِ بَعْدَ العَشَاءِ، لٰكِنِّي أَنَامُ مُتَأَخِّرًا جِدًّا.</a:t>
@@ -12754,6 +12855,7 @@
                   <a:srgbClr val="1B3B6F"/>
                 </a:solidFill>
                 <a:latin typeface="Amiri" pitchFamily="2" charset="-78"/>
+                <a:ea typeface="Amiri" pitchFamily="2" charset="-78"/>
                 <a:cs typeface="Amiri" pitchFamily="2" charset="-78"/>
               </a:rPr>
               <a:t>وَمَتَى تَدْرُسُ؟</a:t>
@@ -12857,6 +12959,7 @@
                   <a:srgbClr val="1B3B6F"/>
                 </a:solidFill>
                 <a:latin typeface="Amiri" pitchFamily="2" charset="-78"/>
+                <a:ea typeface="Amiri" pitchFamily="2" charset="-78"/>
                 <a:cs typeface="Amiri" pitchFamily="2" charset="-78"/>
               </a:rPr>
               <a:t>كُرَةُ القَدَمِ، لِأَنَّهَا تُفْرِغُ طَاقَتِي، وَلِأَنَّ أَصْدِقَائِي فِي الفَرِيقِ.</a:t>
@@ -12933,6 +13036,7 @@
                   <a:srgbClr val="1B3B6F"/>
                 </a:solidFill>
                 <a:latin typeface="Amiri" pitchFamily="2" charset="-78"/>
+                <a:ea typeface="Amiri" pitchFamily="2" charset="-78"/>
                 <a:cs typeface="Amiri" pitchFamily="2" charset="-78"/>
               </a:rPr>
               <a:t>أَيُّ نَشَاطٍ أَهَمُّ لَكَ؟</a:t>
@@ -13036,6 +13140,7 @@
                   <a:srgbClr val="1B3B6F"/>
                 </a:solidFill>
                 <a:latin typeface="Amiri" pitchFamily="2" charset="-78"/>
+                <a:ea typeface="Amiri" pitchFamily="2" charset="-78"/>
                 <a:cs typeface="Amiri" pitchFamily="2" charset="-78"/>
               </a:rPr>
               <a:t>أَيَّ نَشَاطٍ تَنْصَحُنِي أَنْ أَتْرُكَهُ فِي رَأْيِكَ؟</a:t>
@@ -13112,6 +13217,7 @@
                   <a:srgbClr val="1B3B6F"/>
                 </a:solidFill>
                 <a:latin typeface="Amiri" pitchFamily="2" charset="-78"/>
+                <a:ea typeface="Amiri" pitchFamily="2" charset="-78"/>
                 <a:cs typeface="Amiri" pitchFamily="2" charset="-78"/>
               </a:rPr>
               <a:t>رُبَّمَا يَجِبُ أَنْ تَتْرُكَ نَشَاطًا.</a:t>
@@ -13215,6 +13321,7 @@
                   <a:srgbClr val="1B3B6F"/>
                 </a:solidFill>
                 <a:latin typeface="Amiri" pitchFamily="2" charset="-78"/>
+                <a:ea typeface="Amiri" pitchFamily="2" charset="-78"/>
                 <a:cs typeface="Amiri" pitchFamily="2" charset="-78"/>
               </a:rPr>
               <a:t>كُنْتُ أَلْعَبُ فِي الحَدِيقَةِ مَعَ أَخِي كُلَّ يَوْمٍ، وَلَمْ تَكُنْ عِنْدِي أَنْشِطَةٌ كَثِيرَةٌ.</a:t>
@@ -13291,6 +13398,7 @@
                   <a:srgbClr val="1B3B6F"/>
                 </a:solidFill>
                 <a:latin typeface="Amiri" pitchFamily="2" charset="-78"/>
+                <a:ea typeface="Amiri" pitchFamily="2" charset="-78"/>
                 <a:cs typeface="Amiri" pitchFamily="2" charset="-78"/>
               </a:rPr>
               <a:t>كَيْفَ كَانَ وَقْتُ فَرَاغِكَ عِنْدَمَا كُنْتَ صَغِيرًا؟</a:t>
@@ -13500,6 +13608,7 @@
                   <a:srgbClr val="D4AF37"/>
                 </a:solidFill>
                 <a:latin typeface="Amiri" pitchFamily="2" charset="-78"/>
+                <a:ea typeface="Amiri" pitchFamily="2" charset="-78"/>
                 <a:cs typeface="Amiri" pitchFamily="2" charset="-78"/>
               </a:rPr>
               <a:t>م</a:t>
@@ -13820,6 +13929,7 @@
                   <a:srgbClr val="8A6D1E"/>
                 </a:solidFill>
                 <a:latin typeface="Amiri" pitchFamily="2" charset="-78"/>
+                <a:ea typeface="Amiri" pitchFamily="2" charset="-78"/>
                 <a:cs typeface="Amiri" pitchFamily="2" charset="-78"/>
               </a:rPr>
               <a:t>نَمُوذَجُ الإِجَابَةِ</a:t>
@@ -14062,6 +14172,7 @@
                   <a:srgbClr val="1B3B6F"/>
                 </a:solidFill>
                 <a:latin typeface="Amiri" pitchFamily="2" charset="-78"/>
+                <a:ea typeface="Amiri" pitchFamily="2" charset="-78"/>
                 <a:cs typeface="Amiri" pitchFamily="2" charset="-78"/>
               </a:rPr>
               <a:t>يَقْضِي أَغْلَبُهُمْ سَاعَاتٍ أَمَامَ الشَّاشَاتِ؛ فَمَثَلًا يَلْعَبُ أَخِي أَلْعَابَ الفِيدْيُو أَرْبَعَ سَاعَاتٍ يَوْمِيًّا.</a:t>
@@ -14138,6 +14249,7 @@
                   <a:srgbClr val="1B3B6F"/>
                 </a:solidFill>
                 <a:latin typeface="Amiri" pitchFamily="2" charset="-78"/>
+                <a:ea typeface="Amiri" pitchFamily="2" charset="-78"/>
                 <a:cs typeface="Amiri" pitchFamily="2" charset="-78"/>
               </a:rPr>
               <a:t>كَيْفَ يَقْضِي الشَّبَابُ وَقْتَ فَرَاغِهِمْ اليَوْمَ؟</a:t>
@@ -14241,6 +14353,7 @@
                   <a:srgbClr val="1B3B6F"/>
                 </a:solidFill>
                 <a:latin typeface="Amiri" pitchFamily="2" charset="-78"/>
+                <a:ea typeface="Amiri" pitchFamily="2" charset="-78"/>
                 <a:cs typeface="Amiri" pitchFamily="2" charset="-78"/>
               </a:rPr>
               <a:t>لَيْسَتْ مُضِرَّةً دَائِمًا؛ فَبَعْضُهَا يُنَمِّي التَّفْكِيرَ، لٰكِنَّ الإِفْرَاطَ فِيهَا يُؤَثِّرُ فِي النَّوْمِ وَالدِّرَاسَةِ.</a:t>
@@ -14317,6 +14430,7 @@
                   <a:srgbClr val="1B3B6F"/>
                 </a:solidFill>
                 <a:latin typeface="Amiri" pitchFamily="2" charset="-78"/>
+                <a:ea typeface="Amiri" pitchFamily="2" charset="-78"/>
                 <a:cs typeface="Amiri" pitchFamily="2" charset="-78"/>
               </a:rPr>
               <a:t>هَلْ أَلْعَابُ الفِيدْيُو مُضِرَّةٌ دَائِمًا؟</a:t>
@@ -14420,6 +14534,7 @@
                   <a:srgbClr val="1B3B6F"/>
                 </a:solidFill>
                 <a:latin typeface="Amiri" pitchFamily="2" charset="-78"/>
+                <a:ea typeface="Amiri" pitchFamily="2" charset="-78"/>
                 <a:cs typeface="Amiri" pitchFamily="2" charset="-78"/>
               </a:rPr>
               <a:t>كَانُوا يَلْعَبُونَ فِي الشَّوَارِعِ وَيَصْنَعُونَ أَلْعَابَهُمْ بِأَيْدِيهِمْ، أَمَّا اليَوْمَ فَيَجْلِسُونَ وَحْدَهُمْ فِي غُرَفِهِمْ.</a:t>
@@ -14496,6 +14611,7 @@
                   <a:srgbClr val="1B3B6F"/>
                 </a:solidFill>
                 <a:latin typeface="Amiri" pitchFamily="2" charset="-78"/>
+                <a:ea typeface="Amiri" pitchFamily="2" charset="-78"/>
                 <a:cs typeface="Amiri" pitchFamily="2" charset="-78"/>
               </a:rPr>
               <a:t>كَيْفَ كَانَ الشَّبَابُ يَقْضُونَ وَقْتَهُمْ فِي المَاضِي؟</a:t>
@@ -14599,6 +14715,7 @@
                   <a:srgbClr val="1B3B6F"/>
                 </a:solidFill>
                 <a:latin typeface="Amiri" pitchFamily="2" charset="-78"/>
+                <a:ea typeface="Amiri" pitchFamily="2" charset="-78"/>
                 <a:cs typeface="Amiri" pitchFamily="2" charset="-78"/>
               </a:rPr>
               <a:t>صَحِيحٌ أَنَّنَا نَلْعَبُ مَعَ أَصْدِقَاءَ عَلَى الإِنْتَرْنِتِ، غَيْرَ أَنَّ اللِّقَاءَ وَجْهًا لِوَجْهٍ أَعْمَقُ وَأَصْدَقُ.</a:t>
@@ -14675,6 +14792,7 @@
                   <a:srgbClr val="1B3B6F"/>
                 </a:solidFill>
                 <a:latin typeface="Amiri" pitchFamily="2" charset="-78"/>
+                <a:ea typeface="Amiri" pitchFamily="2" charset="-78"/>
                 <a:cs typeface="Amiri" pitchFamily="2" charset="-78"/>
               </a:rPr>
               <a:t>لٰكِنَّ الأَلْعَابَ الإِلِكْتِرُونِيَّةَ اجْتِمَاعِيَّةٌ أَيْضًا!</a:t>
@@ -14778,6 +14896,7 @@
                   <a:srgbClr val="1B3B6F"/>
                 </a:solidFill>
                 <a:latin typeface="Amiri" pitchFamily="2" charset="-78"/>
+                <a:ea typeface="Amiri" pitchFamily="2" charset="-78"/>
                 <a:cs typeface="Amiri" pitchFamily="2" charset="-78"/>
               </a:rPr>
               <a:t>لَوْ كَانَ عِنْدِي يَوْمٌ حُرٌّ، لَتَسَلَّقْتُ جَبَلًا مَعَ أَصْدِقَائِي، ثُمَّ لَطَبَخْنَا عَشَاءً عَلَى النَّارِ.</a:t>
@@ -14854,6 +14973,7 @@
                   <a:srgbClr val="1B3B6F"/>
                 </a:solidFill>
                 <a:latin typeface="Amiri" pitchFamily="2" charset="-78"/>
+                <a:ea typeface="Amiri" pitchFamily="2" charset="-78"/>
                 <a:cs typeface="Amiri" pitchFamily="2" charset="-78"/>
               </a:rPr>
               <a:t>لَوْ كَانَ عِنْدَكَ يَوْمٌ حُرٌّ تَمَامًا، كَيْفَ تَقْضِيهِ؟</a:t>
@@ -15063,6 +15183,7 @@
                   <a:srgbClr val="D4AF37"/>
                 </a:solidFill>
                 <a:latin typeface="Amiri" pitchFamily="2" charset="-78"/>
+                <a:ea typeface="Amiri" pitchFamily="2" charset="-78"/>
                 <a:cs typeface="Amiri" pitchFamily="2" charset="-78"/>
               </a:rPr>
               <a:t>م</a:t>
@@ -15383,6 +15504,7 @@
                   <a:srgbClr val="8A6D1E"/>
                 </a:solidFill>
                 <a:latin typeface="Amiri" pitchFamily="2" charset="-78"/>
+                <a:ea typeface="Amiri" pitchFamily="2" charset="-78"/>
                 <a:cs typeface="Amiri" pitchFamily="2" charset="-78"/>
               </a:rPr>
               <a:t>هِوَايَاتِي</a:t>
@@ -15663,6 +15785,7 @@
                   <a:srgbClr val="1B3B6F"/>
                 </a:solidFill>
                 <a:latin typeface="Amiri" pitchFamily="2" charset="-78"/>
+                <a:ea typeface="Amiri" pitchFamily="2" charset="-78"/>
                 <a:cs typeface="Amiri" pitchFamily="2" charset="-78"/>
               </a:rPr>
               <a:t>هِوَايَتِي المُفَضَّلَةُ …</a:t>
@@ -15739,6 +15862,7 @@
                   <a:srgbClr val="1B3B6F"/>
                 </a:solidFill>
                 <a:latin typeface="Amiri" pitchFamily="2" charset="-78"/>
+                <a:ea typeface="Amiri" pitchFamily="2" charset="-78"/>
                 <a:cs typeface="Amiri" pitchFamily="2" charset="-78"/>
               </a:rPr>
               <a:t>مَا هِوَايَتُكَ المُفَضَّلَةُ؟</a:t>
@@ -15907,6 +16031,7 @@
                   <a:srgbClr val="1B3B6F"/>
                 </a:solidFill>
                 <a:latin typeface="Amiri" pitchFamily="2" charset="-78"/>
+                <a:ea typeface="Amiri" pitchFamily="2" charset="-78"/>
                 <a:cs typeface="Amiri" pitchFamily="2" charset="-78"/>
               </a:rPr>
               <a:t>أُمَارِسُ الرِّيَاضَةَ …</a:t>
@@ -15983,6 +16108,7 @@
                   <a:srgbClr val="1B3B6F"/>
                 </a:solidFill>
                 <a:latin typeface="Amiri" pitchFamily="2" charset="-78"/>
+                <a:ea typeface="Amiri" pitchFamily="2" charset="-78"/>
                 <a:cs typeface="Amiri" pitchFamily="2" charset="-78"/>
               </a:rPr>
               <a:t>كَمْ مَرَّةً تُمَارِسُ الرِّيَاضَةَ؟</a:t>
@@ -16151,6 +16277,7 @@
                   <a:srgbClr val="1B3B6F"/>
                 </a:solidFill>
                 <a:latin typeface="Amiri" pitchFamily="2" charset="-78"/>
+                <a:ea typeface="Amiri" pitchFamily="2" charset="-78"/>
                 <a:cs typeface="Amiri" pitchFamily="2" charset="-78"/>
               </a:rPr>
               <a:t>نَعَمْ، أَسْتَطِيعُ … / لَا، لَا أَسْتَطِيعُ …</a:t>
@@ -16227,6 +16354,7 @@
                   <a:srgbClr val="1B3B6F"/>
                 </a:solidFill>
                 <a:latin typeface="Amiri" pitchFamily="2" charset="-78"/>
+                <a:ea typeface="Amiri" pitchFamily="2" charset="-78"/>
                 <a:cs typeface="Amiri" pitchFamily="2" charset="-78"/>
               </a:rPr>
               <a:t>هَلْ تَسْتَطِيعُ أَنْ تَعْزِفَ عَلَى آلَةٍ مُوسِيقِيَّةٍ؟</a:t>
@@ -16395,6 +16523,7 @@
                   <a:srgbClr val="1B3B6F"/>
                 </a:solidFill>
                 <a:latin typeface="Amiri" pitchFamily="2" charset="-78"/>
+                <a:ea typeface="Amiri" pitchFamily="2" charset="-78"/>
                 <a:cs typeface="Amiri" pitchFamily="2" charset="-78"/>
               </a:rPr>
               <a:t>يَوْمَ السَّبْتِ …</a:t>
@@ -16471,6 +16600,7 @@
                   <a:srgbClr val="1B3B6F"/>
                 </a:solidFill>
                 <a:latin typeface="Amiri" pitchFamily="2" charset="-78"/>
+                <a:ea typeface="Amiri" pitchFamily="2" charset="-78"/>
                 <a:cs typeface="Amiri" pitchFamily="2" charset="-78"/>
               </a:rPr>
               <a:t>مَاذَا تَفْعَلُ يَوْمَ السَّبْتِ؟</a:t>
@@ -16639,6 +16769,7 @@
                   <a:srgbClr val="1B3B6F"/>
                 </a:solidFill>
                 <a:latin typeface="Amiri" pitchFamily="2" charset="-78"/>
+                <a:ea typeface="Amiri" pitchFamily="2" charset="-78"/>
                 <a:cs typeface="Amiri" pitchFamily="2" charset="-78"/>
               </a:rPr>
               <a:t>نَعَمْ / لَا، …</a:t>
@@ -16715,6 +16846,7 @@
                   <a:srgbClr val="1B3B6F"/>
                 </a:solidFill>
                 <a:latin typeface="Amiri" pitchFamily="2" charset="-78"/>
+                <a:ea typeface="Amiri" pitchFamily="2" charset="-78"/>
                 <a:cs typeface="Amiri" pitchFamily="2" charset="-78"/>
               </a:rPr>
               <a:t>هَلْ تُحِبُّ القِرَاءَةَ؟</a:t>
@@ -16869,6 +17001,7 @@
                   <a:srgbClr val="1B3B6F"/>
                 </a:solidFill>
                 <a:latin typeface="Amiri" pitchFamily="2" charset="-78"/>
+                <a:ea typeface="Amiri" pitchFamily="2" charset="-78"/>
                 <a:cs typeface="Amiri" pitchFamily="2" charset="-78"/>
               </a:rPr>
               <a:t>عَفْوًا، هَلْ يُمْكِنُ أَنْ تُعِيدَ السُّؤَالَ؟</a:t>
@@ -17002,6 +17135,7 @@
                   <a:srgbClr val="D4AF37"/>
                 </a:solidFill>
                 <a:latin typeface="Amiri" pitchFamily="2" charset="-78"/>
+                <a:ea typeface="Amiri" pitchFamily="2" charset="-78"/>
                 <a:cs typeface="Amiri" pitchFamily="2" charset="-78"/>
               </a:rPr>
               <a:t>م</a:t>
@@ -17322,6 +17456,7 @@
                   <a:srgbClr val="8A6D1E"/>
                 </a:solidFill>
                 <a:latin typeface="Amiri" pitchFamily="2" charset="-78"/>
+                <a:ea typeface="Amiri" pitchFamily="2" charset="-78"/>
                 <a:cs typeface="Amiri" pitchFamily="2" charset="-78"/>
               </a:rPr>
               <a:t>وَقْتُ الفَرَاغِ</a:t>
@@ -17602,6 +17737,7 @@
                   <a:srgbClr val="1B3B6F"/>
                 </a:solidFill>
                 <a:latin typeface="Amiri" pitchFamily="2" charset="-78"/>
+                <a:ea typeface="Amiri" pitchFamily="2" charset="-78"/>
                 <a:cs typeface="Amiri" pitchFamily="2" charset="-78"/>
               </a:rPr>
               <a:t>بَدَأْتُ … عِنْدَمَا …</a:t>
@@ -17678,6 +17814,7 @@
                   <a:srgbClr val="1B3B6F"/>
                 </a:solidFill>
                 <a:latin typeface="Amiri" pitchFamily="2" charset="-78"/>
+                <a:ea typeface="Amiri" pitchFamily="2" charset="-78"/>
                 <a:cs typeface="Amiri" pitchFamily="2" charset="-78"/>
               </a:rPr>
               <a:t>كَيْفَ بَدَأْتَ هِوَايَتَكَ؟</a:t>
@@ -17781,6 +17918,7 @@
                   <a:srgbClr val="1B3B6F"/>
                 </a:solidFill>
                 <a:latin typeface="Amiri" pitchFamily="2" charset="-78"/>
+                <a:ea typeface="Amiri" pitchFamily="2" charset="-78"/>
                 <a:cs typeface="Amiri" pitchFamily="2" charset="-78"/>
               </a:rPr>
               <a:t>أُفَضِّلُ … لِأَنَّ …</a:t>
@@ -17857,6 +17995,7 @@
                   <a:srgbClr val="1B3B6F"/>
                 </a:solidFill>
                 <a:latin typeface="Amiri" pitchFamily="2" charset="-78"/>
+                <a:ea typeface="Amiri" pitchFamily="2" charset="-78"/>
                 <a:cs typeface="Amiri" pitchFamily="2" charset="-78"/>
               </a:rPr>
               <a:t>هَلْ تُفَضِّلُ الرِّيَاضَةَ الجَمَاعِيَّةَ أَمِ الفَرْدِيَّةَ؟</a:t>
@@ -17960,6 +18099,7 @@
                   <a:srgbClr val="1B3B6F"/>
                 </a:solidFill>
                 <a:latin typeface="Amiri" pitchFamily="2" charset="-78"/>
+                <a:ea typeface="Amiri" pitchFamily="2" charset="-78"/>
                 <a:cs typeface="Amiri" pitchFamily="2" charset="-78"/>
               </a:rPr>
               <a:t>عِنْدَمَا … أَبْقَى … وَ…</a:t>
@@ -18036,6 +18176,7 @@
                   <a:srgbClr val="1B3B6F"/>
                 </a:solidFill>
                 <a:latin typeface="Amiri" pitchFamily="2" charset="-78"/>
+                <a:ea typeface="Amiri" pitchFamily="2" charset="-78"/>
                 <a:cs typeface="Amiri" pitchFamily="2" charset="-78"/>
               </a:rPr>
               <a:t>مَاذَا تَفْعَلُ عِنْدَمَا يَكُونُ الجَوُّ مُمْطِرًا؟</a:t>
@@ -18139,6 +18280,7 @@
                   <a:srgbClr val="1B3B6F"/>
                 </a:solidFill>
                 <a:latin typeface="Amiri" pitchFamily="2" charset="-78"/>
+                <a:ea typeface="Amiri" pitchFamily="2" charset="-78"/>
                 <a:cs typeface="Amiri" pitchFamily="2" charset="-78"/>
               </a:rPr>
               <a:t>لِأَنَّهَا … وَ…</a:t>
@@ -18215,6 +18357,7 @@
                   <a:srgbClr val="1B3B6F"/>
                 </a:solidFill>
                 <a:latin typeface="Amiri" pitchFamily="2" charset="-78"/>
+                <a:ea typeface="Amiri" pitchFamily="2" charset="-78"/>
                 <a:cs typeface="Amiri" pitchFamily="2" charset="-78"/>
               </a:rPr>
               <a:t>لِمَاذَا تُعْتَبَرُ الهِوَايَاتُ مُهِمَّةً؟</a:t>
@@ -18318,6 +18461,7 @@
                   <a:srgbClr val="1B3B6F"/>
                 </a:solidFill>
                 <a:latin typeface="Amiri" pitchFamily="2" charset="-78"/>
+                <a:ea typeface="Amiri" pitchFamily="2" charset="-78"/>
                 <a:cs typeface="Amiri" pitchFamily="2" charset="-78"/>
               </a:rPr>
               <a:t>أُرِيدُ أَنْ أُجَرِّبَ … لِأَنَّ …</a:t>
@@ -18394,6 +18538,7 @@
                   <a:srgbClr val="1B3B6F"/>
                 </a:solidFill>
                 <a:latin typeface="Amiri" pitchFamily="2" charset="-78"/>
+                <a:ea typeface="Amiri" pitchFamily="2" charset="-78"/>
                 <a:cs typeface="Amiri" pitchFamily="2" charset="-78"/>
               </a:rPr>
               <a:t>أَيَّ هِوَايَةٍ جَدِيدَةٍ تُرِيدُ أَنْ تُجَرِّبَهَا؟</a:t>
@@ -18603,6 +18748,7 @@
                   <a:srgbClr val="D4AF37"/>
                 </a:solidFill>
                 <a:latin typeface="Amiri" pitchFamily="2" charset="-78"/>
+                <a:ea typeface="Amiri" pitchFamily="2" charset="-78"/>
                 <a:cs typeface="Amiri" pitchFamily="2" charset="-78"/>
               </a:rPr>
               <a:t>م</a:t>
@@ -18923,6 +19069,7 @@
                   <a:srgbClr val="8A6D1E"/>
                 </a:solidFill>
                 <a:latin typeface="Amiri" pitchFamily="2" charset="-78"/>
+                <a:ea typeface="Amiri" pitchFamily="2" charset="-78"/>
                 <a:cs typeface="Amiri" pitchFamily="2" charset="-78"/>
               </a:rPr>
               <a:t>الوَقْتُ الحُرُّ وَالمُجْتَمَعُ</a:t>
@@ -19203,6 +19350,7 @@
                   <a:srgbClr val="1B3B6F"/>
                 </a:solidFill>
                 <a:latin typeface="Amiri" pitchFamily="2" charset="-78"/>
+                <a:ea typeface="Amiri" pitchFamily="2" charset="-78"/>
                 <a:cs typeface="Amiri" pitchFamily="2" charset="-78"/>
               </a:rPr>
               <a:t>لَا أَظُنُّ ذٰلِكَ، لِأَنَّ …</a:t>
@@ -19279,6 +19427,7 @@
                   <a:srgbClr val="1B3B6F"/>
                 </a:solidFill>
                 <a:latin typeface="Amiri" pitchFamily="2" charset="-78"/>
+                <a:ea typeface="Amiri" pitchFamily="2" charset="-78"/>
                 <a:cs typeface="Amiri" pitchFamily="2" charset="-78"/>
               </a:rPr>
               <a:t>هَلْ عِنْدَ الشَّبَابِ وَقْتُ فَرَاغٍ كَافٍ اليَوْمَ؟</a:t>
@@ -19382,6 +19531,7 @@
                   <a:srgbClr val="1B3B6F"/>
                 </a:solidFill>
                 <a:latin typeface="Amiri" pitchFamily="2" charset="-78"/>
+                <a:ea typeface="Amiri" pitchFamily="2" charset="-78"/>
                 <a:cs typeface="Amiri" pitchFamily="2" charset="-78"/>
               </a:rPr>
               <a:t>صَحِيحٌ أَنَّ … غَيْرَ أَنَّ …</a:t>
@@ -19458,6 +19608,7 @@
                   <a:srgbClr val="1B3B6F"/>
                 </a:solidFill>
                 <a:latin typeface="Amiri" pitchFamily="2" charset="-78"/>
+                <a:ea typeface="Amiri" pitchFamily="2" charset="-78"/>
                 <a:cs typeface="Amiri" pitchFamily="2" charset="-78"/>
               </a:rPr>
               <a:t>هَلْ يَجِبُ أَنْ تَكُونَ الأَنْدِيَةُ الرِّيَاضِيَّةُ مَجَّانِيَّةً؟</a:t>
@@ -19561,6 +19712,7 @@
                   <a:srgbClr val="1B3B6F"/>
                 </a:solidFill>
                 <a:latin typeface="Amiri" pitchFamily="2" charset="-78"/>
+                <a:ea typeface="Amiri" pitchFamily="2" charset="-78"/>
                 <a:cs typeface="Amiri" pitchFamily="2" charset="-78"/>
               </a:rPr>
               <a:t>كَانَ أَبِي … أَمَّا أَنَا فَأُصَمِّمُ …</a:t>
@@ -19637,6 +19789,7 @@
                   <a:srgbClr val="1B3B6F"/>
                 </a:solidFill>
                 <a:latin typeface="Amiri" pitchFamily="2" charset="-78"/>
+                <a:ea typeface="Amiri" pitchFamily="2" charset="-78"/>
                 <a:cs typeface="Amiri" pitchFamily="2" charset="-78"/>
               </a:rPr>
               <a:t>مَا الفَرْقُ بَيْنَ هِوَايَاتِكَ وَهِوَايَاتِ وَالِدَيْكَ؟</a:t>
@@ -19740,6 +19893,7 @@
                   <a:srgbClr val="1B3B6F"/>
                 </a:solidFill>
                 <a:latin typeface="Amiri" pitchFamily="2" charset="-78"/>
+                <a:ea typeface="Amiri" pitchFamily="2" charset="-78"/>
                 <a:cs typeface="Amiri" pitchFamily="2" charset="-78"/>
               </a:rPr>
               <a:t>فِي … شَارَكْتُ فِي … فَفُزْتُ …</a:t>
@@ -19816,6 +19970,7 @@
                   <a:srgbClr val="1B3B6F"/>
                 </a:solidFill>
                 <a:latin typeface="Amiri" pitchFamily="2" charset="-78"/>
+                <a:ea typeface="Amiri" pitchFamily="2" charset="-78"/>
                 <a:cs typeface="Amiri" pitchFamily="2" charset="-78"/>
               </a:rPr>
               <a:t>صِفْ إِنْجَازًا حَقَّقْتَهُ فِي هِوَايَتِكَ.</a:t>
@@ -19919,6 +20074,7 @@
                   <a:srgbClr val="1B3B6F"/>
                 </a:solidFill>
                 <a:latin typeface="Amiri" pitchFamily="2" charset="-78"/>
+                <a:ea typeface="Amiri" pitchFamily="2" charset="-78"/>
                 <a:cs typeface="Amiri" pitchFamily="2" charset="-78"/>
               </a:rPr>
               <a:t>لَوْ أَصْبَحَ … عَمَلِي، لَفَقَدَ …</a:t>
@@ -19995,6 +20151,7 @@
                   <a:srgbClr val="1B3B6F"/>
                 </a:solidFill>
                 <a:latin typeface="Amiri" pitchFamily="2" charset="-78"/>
+                <a:ea typeface="Amiri" pitchFamily="2" charset="-78"/>
                 <a:cs typeface="Amiri" pitchFamily="2" charset="-78"/>
               </a:rPr>
               <a:t>لَوْ أَصْبَحَتْ هِوَايَتُكَ عَمَلَكَ، هَلْ تَبْقَى مُمْتِعَةً؟</a:t>
@@ -20204,6 +20361,7 @@
                   <a:srgbClr val="D4AF37"/>
                 </a:solidFill>
                 <a:latin typeface="Amiri" pitchFamily="2" charset="-78"/>
+                <a:ea typeface="Amiri" pitchFamily="2" charset="-78"/>
                 <a:cs typeface="Amiri" pitchFamily="2" charset="-78"/>
               </a:rPr>
               <a:t>م</a:t>
@@ -20524,6 +20682,7 @@
                   <a:srgbClr val="8A6D1E"/>
                 </a:solidFill>
                 <a:latin typeface="Amiri" pitchFamily="2" charset="-78"/>
+                <a:ea typeface="Amiri" pitchFamily="2" charset="-78"/>
                 <a:cs typeface="Amiri" pitchFamily="2" charset="-78"/>
               </a:rPr>
               <a:t>آدَابُ الصَّفِّ</a:t>
@@ -22055,6 +22214,7 @@
                   <a:srgbClr val="D4AF37"/>
                 </a:solidFill>
                 <a:latin typeface="Amiri" pitchFamily="2" charset="-78"/>
+                <a:ea typeface="Amiri" pitchFamily="2" charset="-78"/>
                 <a:cs typeface="Amiri" pitchFamily="2" charset="-78"/>
               </a:rPr>
               <a:t>م</a:t>
@@ -22375,6 +22535,7 @@
                   <a:srgbClr val="8A6D1E"/>
                 </a:solidFill>
                 <a:latin typeface="Amiri" pitchFamily="2" charset="-78"/>
+                <a:ea typeface="Amiri" pitchFamily="2" charset="-78"/>
                 <a:cs typeface="Amiri" pitchFamily="2" charset="-78"/>
               </a:rPr>
               <a:t>نَمُوذَجُ الإِجَابَةِ</a:t>
@@ -22617,6 +22778,7 @@
                   <a:srgbClr val="1B3B6F"/>
                 </a:solidFill>
                 <a:latin typeface="Amiri" pitchFamily="2" charset="-78"/>
+                <a:ea typeface="Amiri" pitchFamily="2" charset="-78"/>
                 <a:cs typeface="Amiri" pitchFamily="2" charset="-78"/>
               </a:rPr>
               <a:t>هِوَايَتِيَ المُفَضَّلَةُ الرَّسْمُ.</a:t>
@@ -22693,6 +22855,7 @@
                   <a:srgbClr val="1B3B6F"/>
                 </a:solidFill>
                 <a:latin typeface="Amiri" pitchFamily="2" charset="-78"/>
+                <a:ea typeface="Amiri" pitchFamily="2" charset="-78"/>
                 <a:cs typeface="Amiri" pitchFamily="2" charset="-78"/>
               </a:rPr>
               <a:t>مَا هِوَايَتُكَ المُفَضَّلَةُ؟</a:t>
@@ -22796,6 +22959,7 @@
                   <a:srgbClr val="1B3B6F"/>
                 </a:solidFill>
                 <a:latin typeface="Amiri" pitchFamily="2" charset="-78"/>
+                <a:ea typeface="Amiri" pitchFamily="2" charset="-78"/>
                 <a:cs typeface="Amiri" pitchFamily="2" charset="-78"/>
               </a:rPr>
               <a:t>أُمَارِسُ الرِّيَاضَةَ مَرَّتَيْنِ فِي الأُسْبُوعِ.</a:t>
@@ -22872,6 +23036,7 @@
                   <a:srgbClr val="1B3B6F"/>
                 </a:solidFill>
                 <a:latin typeface="Amiri" pitchFamily="2" charset="-78"/>
+                <a:ea typeface="Amiri" pitchFamily="2" charset="-78"/>
                 <a:cs typeface="Amiri" pitchFamily="2" charset="-78"/>
               </a:rPr>
               <a:t>كَمْ مَرَّةً تُمَارِسُ الرِّيَاضَةَ؟</a:t>
@@ -22975,6 +23140,7 @@
                   <a:srgbClr val="1B3B6F"/>
                 </a:solidFill>
                 <a:latin typeface="Amiri" pitchFamily="2" charset="-78"/>
+                <a:ea typeface="Amiri" pitchFamily="2" charset="-78"/>
                 <a:cs typeface="Amiri" pitchFamily="2" charset="-78"/>
               </a:rPr>
               <a:t>نَعَمْ، أَسْتَطِيعُ أَنْ أَعْزِفَ عَلَى العُودِ قَلِيلًا.</a:t>
@@ -23051,6 +23217,7 @@
                   <a:srgbClr val="1B3B6F"/>
                 </a:solidFill>
                 <a:latin typeface="Amiri" pitchFamily="2" charset="-78"/>
+                <a:ea typeface="Amiri" pitchFamily="2" charset="-78"/>
                 <a:cs typeface="Amiri" pitchFamily="2" charset="-78"/>
               </a:rPr>
               <a:t>هَلْ تَسْتَطِيعُ أَنْ تَعْزِفَ عَلَى آلَةٍ مُوسِيقِيَّةٍ؟</a:t>
@@ -23154,6 +23321,7 @@
                   <a:srgbClr val="1B3B6F"/>
                 </a:solidFill>
                 <a:latin typeface="Amiri" pitchFamily="2" charset="-78"/>
+                <a:ea typeface="Amiri" pitchFamily="2" charset="-78"/>
                 <a:cs typeface="Amiri" pitchFamily="2" charset="-78"/>
               </a:rPr>
               <a:t>يَوْمَ السَّبْتِ أَلْعَبُ كُرَةَ القَدَمِ مَعَ فَرِيقِي فِي الصَّبَاحِ.</a:t>
@@ -23230,6 +23398,7 @@
                   <a:srgbClr val="1B3B6F"/>
                 </a:solidFill>
                 <a:latin typeface="Amiri" pitchFamily="2" charset="-78"/>
+                <a:ea typeface="Amiri" pitchFamily="2" charset="-78"/>
                 <a:cs typeface="Amiri" pitchFamily="2" charset="-78"/>
               </a:rPr>
               <a:t>مَاذَا تَفْعَلُ يَوْمَ السَّبْتِ؟</a:t>
@@ -23333,6 +23502,7 @@
                   <a:srgbClr val="1B3B6F"/>
                 </a:solidFill>
                 <a:latin typeface="Amiri" pitchFamily="2" charset="-78"/>
+                <a:ea typeface="Amiri" pitchFamily="2" charset="-78"/>
                 <a:cs typeface="Amiri" pitchFamily="2" charset="-78"/>
               </a:rPr>
               <a:t>نَعَمْ، أُحِبُّهَا كَثِيرًا، وَأَقْرَأُ كُلَّ لَيْلَةٍ قَبْلَ النَّوْمِ.</a:t>
@@ -23409,6 +23579,7 @@
                   <a:srgbClr val="1B3B6F"/>
                 </a:solidFill>
                 <a:latin typeface="Amiri" pitchFamily="2" charset="-78"/>
+                <a:ea typeface="Amiri" pitchFamily="2" charset="-78"/>
                 <a:cs typeface="Amiri" pitchFamily="2" charset="-78"/>
               </a:rPr>
               <a:t>هَلْ تُحِبُّ القِرَاءَةَ؟</a:t>
@@ -23618,6 +23789,7 @@
                   <a:srgbClr val="D4AF37"/>
                 </a:solidFill>
                 <a:latin typeface="Amiri" pitchFamily="2" charset="-78"/>
+                <a:ea typeface="Amiri" pitchFamily="2" charset="-78"/>
                 <a:cs typeface="Amiri" pitchFamily="2" charset="-78"/>
               </a:rPr>
               <a:t>م</a:t>
@@ -23938,6 +24110,7 @@
                   <a:srgbClr val="8A6D1E"/>
                 </a:solidFill>
                 <a:latin typeface="Amiri" pitchFamily="2" charset="-78"/>
+                <a:ea typeface="Amiri" pitchFamily="2" charset="-78"/>
                 <a:cs typeface="Amiri" pitchFamily="2" charset="-78"/>
               </a:rPr>
               <a:t>نَمُوذَجُ الإِجَابَةِ</a:t>
@@ -24180,6 +24353,7 @@
                   <a:srgbClr val="1B3B6F"/>
                 </a:solidFill>
                 <a:latin typeface="Amiri" pitchFamily="2" charset="-78"/>
+                <a:ea typeface="Amiri" pitchFamily="2" charset="-78"/>
                 <a:cs typeface="Amiri" pitchFamily="2" charset="-78"/>
               </a:rPr>
               <a:t>بَدَأْتُ الرَّسْمَ عِنْدَمَا أَهْدَتْنِي خَالَتِي أَلْوَانًا مَائِيَّةً فِي عِيدِ مِيلَادِي العَاشِرِ.</a:t>
@@ -24256,6 +24430,7 @@
                   <a:srgbClr val="1B3B6F"/>
                 </a:solidFill>
                 <a:latin typeface="Amiri" pitchFamily="2" charset="-78"/>
+                <a:ea typeface="Amiri" pitchFamily="2" charset="-78"/>
                 <a:cs typeface="Amiri" pitchFamily="2" charset="-78"/>
               </a:rPr>
               <a:t>كَيْفَ بَدَأْتَ هِوَايَتَكَ؟</a:t>
@@ -24359,6 +24534,7 @@
                   <a:srgbClr val="1B3B6F"/>
                 </a:solidFill>
                 <a:latin typeface="Amiri" pitchFamily="2" charset="-78"/>
+                <a:ea typeface="Amiri" pitchFamily="2" charset="-78"/>
                 <a:cs typeface="Amiri" pitchFamily="2" charset="-78"/>
               </a:rPr>
               <a:t>أُفَضِّلُ الرِّيَاضَةَ الجَمَاعِيَّةَ، لِأَنِّي أُحِبُّ العَمَلَ مَعَ الآخَرِينَ، وَالفَوْزُ مَعًا أَمْتَعُ.</a:t>
@@ -24435,6 +24611,7 @@
                   <a:srgbClr val="1B3B6F"/>
                 </a:solidFill>
                 <a:latin typeface="Amiri" pitchFamily="2" charset="-78"/>
+                <a:ea typeface="Amiri" pitchFamily="2" charset="-78"/>
                 <a:cs typeface="Amiri" pitchFamily="2" charset="-78"/>
               </a:rPr>
               <a:t>هَلْ تُفَضِّلُ الرِّيَاضَةَ الجَمَاعِيَّةَ أَمِ الفَرْدِيَّةَ؟</a:t>
@@ -24538,6 +24715,7 @@
                   <a:srgbClr val="1B3B6F"/>
                 </a:solidFill>
                 <a:latin typeface="Amiri" pitchFamily="2" charset="-78"/>
+                <a:ea typeface="Amiri" pitchFamily="2" charset="-78"/>
                 <a:cs typeface="Amiri" pitchFamily="2" charset="-78"/>
               </a:rPr>
               <a:t>عِنْدَمَا يَكُونُ الجَوُّ مُمْطِرًا، أَبْقَى فِي البَيْتِ، وَأَطْبُخُ مَعَ أُمِّي أَوْ أُشَاهِدُ فِيلْمًا.</a:t>
@@ -24614,6 +24792,7 @@
                   <a:srgbClr val="1B3B6F"/>
                 </a:solidFill>
                 <a:latin typeface="Amiri" pitchFamily="2" charset="-78"/>
+                <a:ea typeface="Amiri" pitchFamily="2" charset="-78"/>
                 <a:cs typeface="Amiri" pitchFamily="2" charset="-78"/>
               </a:rPr>
               <a:t>مَاذَا تَفْعَلُ عِنْدَمَا يَكُونُ الجَوُّ مُمْطِرًا؟</a:t>
@@ -24717,6 +24896,7 @@
                   <a:srgbClr val="1B3B6F"/>
                 </a:solidFill>
                 <a:latin typeface="Amiri" pitchFamily="2" charset="-78"/>
+                <a:ea typeface="Amiri" pitchFamily="2" charset="-78"/>
                 <a:cs typeface="Amiri" pitchFamily="2" charset="-78"/>
               </a:rPr>
               <a:t>لِأَنَّهَا تُرِيحُنَا مِنْ ضَغْطِ الدِّرَاسَةِ، وَتُعَلِّمُنَا مَهَارَاتٍ جَدِيدَةً، وَتُعَرِّفُنَا بِأَصْدِقَاءَ جُدُدٍ.</a:t>
@@ -24793,6 +24973,7 @@
                   <a:srgbClr val="1B3B6F"/>
                 </a:solidFill>
                 <a:latin typeface="Amiri" pitchFamily="2" charset="-78"/>
+                <a:ea typeface="Amiri" pitchFamily="2" charset="-78"/>
                 <a:cs typeface="Amiri" pitchFamily="2" charset="-78"/>
               </a:rPr>
               <a:t>لِمَاذَا تُعْتَبَرُ الهِوَايَاتُ مُهِمَّةً؟</a:t>
@@ -24896,6 +25077,7 @@
                   <a:srgbClr val="1B3B6F"/>
                 </a:solidFill>
                 <a:latin typeface="Amiri" pitchFamily="2" charset="-78"/>
+                <a:ea typeface="Amiri" pitchFamily="2" charset="-78"/>
                 <a:cs typeface="Amiri" pitchFamily="2" charset="-78"/>
               </a:rPr>
               <a:t>أُرِيدُ أَنْ أُجَرِّبَ التَّصْوِيرَ، لِأَنِّي أُحِبُّ الطَّبِيعَةَ، وَسَأَشْتَرِي كَامِيرَا بِمَالِي.</a:t>
@@ -24972,6 +25154,7 @@
                   <a:srgbClr val="1B3B6F"/>
                 </a:solidFill>
                 <a:latin typeface="Amiri" pitchFamily="2" charset="-78"/>
+                <a:ea typeface="Amiri" pitchFamily="2" charset="-78"/>
                 <a:cs typeface="Amiri" pitchFamily="2" charset="-78"/>
               </a:rPr>
               <a:t>أَيَّ هِوَايَةٍ جَدِيدَةٍ تُرِيدُ أَنْ تُجَرِّبَهَا؟</a:t>
@@ -25181,6 +25364,7 @@
                   <a:srgbClr val="D4AF37"/>
                 </a:solidFill>
                 <a:latin typeface="Amiri" pitchFamily="2" charset="-78"/>
+                <a:ea typeface="Amiri" pitchFamily="2" charset="-78"/>
                 <a:cs typeface="Amiri" pitchFamily="2" charset="-78"/>
               </a:rPr>
               <a:t>م</a:t>
@@ -25501,6 +25685,7 @@
                   <a:srgbClr val="8A6D1E"/>
                 </a:solidFill>
                 <a:latin typeface="Amiri" pitchFamily="2" charset="-78"/>
+                <a:ea typeface="Amiri" pitchFamily="2" charset="-78"/>
                 <a:cs typeface="Amiri" pitchFamily="2" charset="-78"/>
               </a:rPr>
               <a:t>نَمُوذَجُ الإِجَابَةِ</a:t>
@@ -25743,6 +25928,7 @@
                   <a:srgbClr val="1B3B6F"/>
                 </a:solidFill>
                 <a:latin typeface="Amiri" pitchFamily="2" charset="-78"/>
+                <a:ea typeface="Amiri" pitchFamily="2" charset="-78"/>
                 <a:cs typeface="Amiri" pitchFamily="2" charset="-78"/>
               </a:rPr>
               <a:t>لَا أَظُنُّ ذٰلِكَ، لِأَنَّ الوَاجِبَاتِ وَالدُّرُوسَ الإِضَافِيَّةَ تَأْخُذُ أَغْلَبَ وَقْتِهِمْ، حَتَّى فِي نِهَايَةِ الأُسْبُوعِ.</a:t>
@@ -25819,6 +26005,7 @@
                   <a:srgbClr val="1B3B6F"/>
                 </a:solidFill>
                 <a:latin typeface="Amiri" pitchFamily="2" charset="-78"/>
+                <a:ea typeface="Amiri" pitchFamily="2" charset="-78"/>
                 <a:cs typeface="Amiri" pitchFamily="2" charset="-78"/>
               </a:rPr>
               <a:t>هَلْ عِنْدَ الشَّبَابِ وَقْتُ فَرَاغٍ كَافٍ اليَوْمَ؟</a:t>
@@ -25922,6 +26109,7 @@
                   <a:srgbClr val="1B3B6F"/>
                 </a:solidFill>
                 <a:latin typeface="Amiri" pitchFamily="2" charset="-78"/>
+                <a:ea typeface="Amiri" pitchFamily="2" charset="-78"/>
                 <a:cs typeface="Amiri" pitchFamily="2" charset="-78"/>
               </a:rPr>
               <a:t>صَحِيحٌ أَنَّ الأَنْدِيَةَ تَحْتَاجُ إِلَى المَالِ، غَيْرَ أَنَّ الرِّيَاضَةَ حَقٌّ لِكُلِّ طِفْلٍ، غَنِيًّا كَانَ أَمْ فَقِيرًا.</a:t>
@@ -25998,6 +26186,7 @@
                   <a:srgbClr val="1B3B6F"/>
                 </a:solidFill>
                 <a:latin typeface="Amiri" pitchFamily="2" charset="-78"/>
+                <a:ea typeface="Amiri" pitchFamily="2" charset="-78"/>
                 <a:cs typeface="Amiri" pitchFamily="2" charset="-78"/>
               </a:rPr>
               <a:t>هَلْ يَجِبُ أَنْ تَكُونَ الأَنْدِيَةُ الرِّيَاضِيَّةُ مَجَّانِيَّةً؟</a:t>
@@ -26101,6 +26290,7 @@
                   <a:srgbClr val="1B3B6F"/>
                 </a:solidFill>
                 <a:latin typeface="Amiri" pitchFamily="2" charset="-78"/>
+                <a:ea typeface="Amiri" pitchFamily="2" charset="-78"/>
                 <a:cs typeface="Amiri" pitchFamily="2" charset="-78"/>
               </a:rPr>
               <a:t>كَانَ أَبِي يَجْمَعُ الطَّوَابِعَ وَيُرَاسِلُ أَصْدِقَاءَ مِنْ بُلْدَانٍ أُخْرَى، أَمَّا أَنَا فَأُصَمِّمُ أَلْعَابًا عَلَى الحَاسُوبِ.</a:t>
@@ -26177,6 +26367,7 @@
                   <a:srgbClr val="1B3B6F"/>
                 </a:solidFill>
                 <a:latin typeface="Amiri" pitchFamily="2" charset="-78"/>
+                <a:ea typeface="Amiri" pitchFamily="2" charset="-78"/>
                 <a:cs typeface="Amiri" pitchFamily="2" charset="-78"/>
               </a:rPr>
               <a:t>مَا الفَرْقُ بَيْنَ هِوَايَاتِكَ وَهِوَايَاتِ وَالِدَيْكَ؟</a:t>
@@ -26386,6 +26577,7 @@
                   <a:srgbClr val="D4AF37"/>
                 </a:solidFill>
                 <a:latin typeface="Amiri" pitchFamily="2" charset="-78"/>
+                <a:ea typeface="Amiri" pitchFamily="2" charset="-78"/>
                 <a:cs typeface="Amiri" pitchFamily="2" charset="-78"/>
               </a:rPr>
               <a:t>م</a:t>
@@ -26706,6 +26898,7 @@
                   <a:srgbClr val="8A6D1E"/>
                 </a:solidFill>
                 <a:latin typeface="Amiri" pitchFamily="2" charset="-78"/>
+                <a:ea typeface="Amiri" pitchFamily="2" charset="-78"/>
                 <a:cs typeface="Amiri" pitchFamily="2" charset="-78"/>
               </a:rPr>
               <a:t>نَمُوذَجُ الإِجَابَةِ</a:t>
@@ -26948,6 +27141,7 @@
                   <a:srgbClr val="1B3B6F"/>
                 </a:solidFill>
                 <a:latin typeface="Amiri" pitchFamily="2" charset="-78"/>
+                <a:ea typeface="Amiri" pitchFamily="2" charset="-78"/>
                 <a:cs typeface="Amiri" pitchFamily="2" charset="-78"/>
               </a:rPr>
               <a:t>فِي السَّنَةِ المَاضِيَةِ شَارَكْتُ فِي مُسَابَقَةٍ لِلرَّسْمِ، فَفُزْتُ بِالمَرْكَزِ الثَّانِي، وَعُرِضَتْ لَوْحَتِي فِي مَكْتَبَةِ المَدِينَةِ.</a:t>
@@ -27024,6 +27218,7 @@
                   <a:srgbClr val="1B3B6F"/>
                 </a:solidFill>
                 <a:latin typeface="Amiri" pitchFamily="2" charset="-78"/>
+                <a:ea typeface="Amiri" pitchFamily="2" charset="-78"/>
                 <a:cs typeface="Amiri" pitchFamily="2" charset="-78"/>
               </a:rPr>
               <a:t>صِفْ إِنْجَازًا حَقَّقْتَهُ فِي هِوَايَتِكَ.</a:t>
@@ -27127,6 +27322,7 @@
                   <a:srgbClr val="1B3B6F"/>
                 </a:solidFill>
                 <a:latin typeface="Amiri" pitchFamily="2" charset="-78"/>
+                <a:ea typeface="Amiri" pitchFamily="2" charset="-78"/>
                 <a:cs typeface="Amiri" pitchFamily="2" charset="-78"/>
               </a:rPr>
               <a:t>لَوْ أَصْبَحَ الرَّسْمُ عَمَلِي، لَفَقَدَ جُزْءًا مِنْ مُتْعَتِهِ، لِأَنِّي سَأَرْسُمُ مَا يُرِيدُهُ الزَّبَائِنُ لَا مَا أُرِيدُهُ أَنَا.</a:t>
@@ -27203,6 +27399,7 @@
                   <a:srgbClr val="1B3B6F"/>
                 </a:solidFill>
                 <a:latin typeface="Amiri" pitchFamily="2" charset="-78"/>
+                <a:ea typeface="Amiri" pitchFamily="2" charset="-78"/>
                 <a:cs typeface="Amiri" pitchFamily="2" charset="-78"/>
               </a:rPr>
               <a:t>لَوْ أَصْبَحَتْ هِوَايَتُكَ عَمَلَكَ، هَلْ تَبْقَى مُمْتِعَةً؟</a:t>
@@ -27412,6 +27609,7 @@
                   <a:srgbClr val="D4AF37"/>
                 </a:solidFill>
                 <a:latin typeface="Amiri" pitchFamily="2" charset="-78"/>
+                <a:ea typeface="Amiri" pitchFamily="2" charset="-78"/>
                 <a:cs typeface="Amiri" pitchFamily="2" charset="-78"/>
               </a:rPr>
               <a:t>م</a:t>
@@ -27732,6 +27930,7 @@
                   <a:srgbClr val="8A6D1E"/>
                 </a:solidFill>
                 <a:latin typeface="Amiri" pitchFamily="2" charset="-78"/>
+                <a:ea typeface="Amiri" pitchFamily="2" charset="-78"/>
                 <a:cs typeface="Amiri" pitchFamily="2" charset="-78"/>
               </a:rPr>
               <a:t>قَيِّمْ عَمَلَكَ</a:t>
@@ -28976,6 +29175,7 @@
                   <a:srgbClr val="FFFFFF"/>
                 </a:solidFill>
                 <a:latin typeface="Amiri" pitchFamily="2" charset="-78"/>
+                <a:ea typeface="Amiri" pitchFamily="2" charset="-78"/>
                 <a:cs typeface="Amiri" pitchFamily="2" charset="-78"/>
               </a:rPr>
               <a:t>أَحْسَنْتُمْ! إِلَى اللِّقَاءِ</a:t>
@@ -29128,6 +29328,7 @@
                   <a:srgbClr val="D4AF37"/>
                 </a:solidFill>
                 <a:latin typeface="Amiri" pitchFamily="2" charset="-78"/>
+                <a:ea typeface="Amiri" pitchFamily="2" charset="-78"/>
                 <a:cs typeface="Amiri" pitchFamily="2" charset="-78"/>
               </a:rPr>
               <a:t>وَرْشَةُ الكِتَابَةِ</a:t>
@@ -29261,6 +29462,7 @@
                   <a:srgbClr val="D4AF37"/>
                 </a:solidFill>
                 <a:latin typeface="Amiri" pitchFamily="2" charset="-78"/>
+                <a:ea typeface="Amiri" pitchFamily="2" charset="-78"/>
                 <a:cs typeface="Amiri" pitchFamily="2" charset="-78"/>
               </a:rPr>
               <a:t>م</a:t>
@@ -29581,6 +29783,7 @@
                   <a:srgbClr val="8A6D1E"/>
                 </a:solidFill>
                 <a:latin typeface="Amiri" pitchFamily="2" charset="-78"/>
+                <a:ea typeface="Amiri" pitchFamily="2" charset="-78"/>
                 <a:cs typeface="Amiri" pitchFamily="2" charset="-78"/>
               </a:rPr>
               <a:t>خَرِيطَةُ الوَرْشَةِ</a:t>
@@ -29895,6 +30098,7 @@
                   <a:srgbClr val="1B3B6F"/>
                 </a:solidFill>
                 <a:latin typeface="Amiri" pitchFamily="2" charset="-78"/>
+                <a:ea typeface="Amiri" pitchFamily="2" charset="-78"/>
                 <a:cs typeface="Amiri" pitchFamily="2" charset="-78"/>
               </a:rPr>
               <a:t>كَيْفَ</a:t>
@@ -30171,6 +30375,7 @@
                   <a:srgbClr val="1E6B52"/>
                 </a:solidFill>
                 <a:latin typeface="Amiri" pitchFamily="2" charset="-78"/>
+                <a:ea typeface="Amiri" pitchFamily="2" charset="-78"/>
                 <a:cs typeface="Amiri" pitchFamily="2" charset="-78"/>
               </a:rPr>
               <a:t>تَمْثِيلُ الدَّوْرِ</a:t>
@@ -30447,6 +30652,7 @@
                   <a:srgbClr val="8A6D1E"/>
                 </a:solidFill>
                 <a:latin typeface="Amiri" pitchFamily="2" charset="-78"/>
+                <a:ea typeface="Amiri" pitchFamily="2" charset="-78"/>
                 <a:cs typeface="Amiri" pitchFamily="2" charset="-78"/>
               </a:rPr>
               <a:t>النَّمُوذَجُ</a:t>
@@ -30723,6 +30929,7 @@
                   <a:srgbClr val="1E6B52"/>
                 </a:solidFill>
                 <a:latin typeface="Amiri" pitchFamily="2" charset="-78"/>
+                <a:ea typeface="Amiri" pitchFamily="2" charset="-78"/>
                 <a:cs typeface="Amiri" pitchFamily="2" charset="-78"/>
               </a:rPr>
               <a:t>المُحَادَثَةُ</a:t>
@@ -30999,6 +31206,7 @@
                   <a:srgbClr val="8A6D1E"/>
                 </a:solidFill>
                 <a:latin typeface="Amiri" pitchFamily="2" charset="-78"/>
+                <a:ea typeface="Amiri" pitchFamily="2" charset="-78"/>
                 <a:cs typeface="Amiri" pitchFamily="2" charset="-78"/>
               </a:rPr>
               <a:t>قَيِّمْ</a:t>
@@ -31242,6 +31450,7 @@
                   <a:srgbClr val="D4AF37"/>
                 </a:solidFill>
                 <a:latin typeface="Amiri" pitchFamily="2" charset="-78"/>
+                <a:ea typeface="Amiri" pitchFamily="2" charset="-78"/>
                 <a:cs typeface="Amiri" pitchFamily="2" charset="-78"/>
               </a:rPr>
               <a:t>م</a:t>
@@ -31562,6 +31771,7 @@
                   <a:srgbClr val="8A6D1E"/>
                 </a:solidFill>
                 <a:latin typeface="Amiri" pitchFamily="2" charset="-78"/>
+                <a:ea typeface="Amiri" pitchFamily="2" charset="-78"/>
                 <a:cs typeface="Amiri" pitchFamily="2" charset="-78"/>
               </a:rPr>
               <a:t>امْتِحَانُ التَّحَدُّثِ</a:t>
@@ -32186,6 +32396,7 @@
                   <a:srgbClr val="1B3B6F"/>
                 </a:solidFill>
                 <a:latin typeface="Amiri" pitchFamily="2" charset="-78"/>
+                <a:ea typeface="Amiri" pitchFamily="2" charset="-78"/>
                 <a:cs typeface="Amiri" pitchFamily="2" charset="-78"/>
               </a:rPr>
               <a:t>عَفْوًا، هَلْ يُمْكِنُ أَنْ تُعِيدَ السُّؤَالَ؟</a:t>
@@ -32285,6 +32496,7 @@
                   <a:srgbClr val="1B3B6F"/>
                 </a:solidFill>
                 <a:latin typeface="Amiri" pitchFamily="2" charset="-78"/>
+                <a:ea typeface="Amiri" pitchFamily="2" charset="-78"/>
                 <a:cs typeface="Amiri" pitchFamily="2" charset="-78"/>
               </a:rPr>
               <a:t>لَحْظَةً، دَعْنِي أُفَكِّرُ …</a:t>
@@ -32384,6 +32596,7 @@
                   <a:srgbClr val="1B3B6F"/>
                 </a:solidFill>
                 <a:latin typeface="Amiri" pitchFamily="2" charset="-78"/>
+                <a:ea typeface="Amiri" pitchFamily="2" charset="-78"/>
                 <a:cs typeface="Amiri" pitchFamily="2" charset="-78"/>
               </a:rPr>
               <a:t>أَقْصِدُ …</a:t>
@@ -32555,6 +32768,7 @@
                   <a:srgbClr val="D4AF37"/>
                 </a:solidFill>
                 <a:latin typeface="Amiri" pitchFamily="2" charset="-78"/>
+                <a:ea typeface="Amiri" pitchFamily="2" charset="-78"/>
                 <a:cs typeface="Amiri" pitchFamily="2" charset="-78"/>
               </a:rPr>
               <a:t>م</a:t>
@@ -32875,6 +33089,7 @@
                   <a:srgbClr val="8A6D1E"/>
                 </a:solidFill>
                 <a:latin typeface="Amiri" pitchFamily="2" charset="-78"/>
+                <a:ea typeface="Amiri" pitchFamily="2" charset="-78"/>
                 <a:cs typeface="Amiri" pitchFamily="2" charset="-78"/>
               </a:rPr>
               <a:t>مَاذَا تَفْعَلُ فِي وَقْتِ فَرَاغِكَ؟</a:t>
@@ -33178,6 +33393,7 @@
                   <a:srgbClr val="1B3B6F"/>
                 </a:solidFill>
                 <a:latin typeface="Amiri" pitchFamily="2" charset="-78"/>
+                <a:ea typeface="Amiri" pitchFamily="2" charset="-78"/>
                 <a:cs typeface="Amiri" pitchFamily="2" charset="-78"/>
               </a:rPr>
               <a:t>أَلْعَبُ</a:t>
@@ -33335,6 +33551,7 @@
                   <a:srgbClr val="1B3B6F"/>
                 </a:solidFill>
                 <a:latin typeface="Amiri" pitchFamily="2" charset="-78"/>
+                <a:ea typeface="Amiri" pitchFamily="2" charset="-78"/>
                 <a:cs typeface="Amiri" pitchFamily="2" charset="-78"/>
               </a:rPr>
               <a:t>نَلْعَبُ</a:t>
@@ -33438,6 +33655,7 @@
                   <a:srgbClr val="1B3B6F"/>
                 </a:solidFill>
                 <a:latin typeface="Amiri" pitchFamily="2" charset="-78"/>
+                <a:ea typeface="Amiri" pitchFamily="2" charset="-78"/>
                 <a:cs typeface="Amiri" pitchFamily="2" charset="-78"/>
               </a:rPr>
               <a:t>تَلْعَبُ</a:t>
@@ -33541,6 +33759,7 @@
                   <a:srgbClr val="1B3B6F"/>
                 </a:solidFill>
                 <a:latin typeface="Amiri" pitchFamily="2" charset="-78"/>
+                <a:ea typeface="Amiri" pitchFamily="2" charset="-78"/>
                 <a:cs typeface="Amiri" pitchFamily="2" charset="-78"/>
               </a:rPr>
               <a:t>يَلْعَبُ</a:t>
@@ -33806,6 +34025,7 @@
                   <a:srgbClr val="1B3B6F"/>
                 </a:solidFill>
                 <a:latin typeface="Amiri" pitchFamily="2" charset="-78"/>
+                <a:ea typeface="Amiri" pitchFamily="2" charset="-78"/>
                 <a:cs typeface="Amiri" pitchFamily="2" charset="-78"/>
               </a:rPr>
               <a:t>أُمَارِسُ</a:t>
@@ -33963,6 +34183,7 @@
                   <a:srgbClr val="1B3B6F"/>
                 </a:solidFill>
                 <a:latin typeface="Amiri" pitchFamily="2" charset="-78"/>
+                <a:ea typeface="Amiri" pitchFamily="2" charset="-78"/>
                 <a:cs typeface="Amiri" pitchFamily="2" charset="-78"/>
               </a:rPr>
               <a:t>يُمَارِسُونَ</a:t>
@@ -34066,6 +34287,7 @@
                   <a:srgbClr val="1B3B6F"/>
                 </a:solidFill>
                 <a:latin typeface="Amiri" pitchFamily="2" charset="-78"/>
+                <a:ea typeface="Amiri" pitchFamily="2" charset="-78"/>
                 <a:cs typeface="Amiri" pitchFamily="2" charset="-78"/>
               </a:rPr>
               <a:t>تُمَارِسُ</a:t>
@@ -34169,6 +34391,7 @@
                   <a:srgbClr val="1B3B6F"/>
                 </a:solidFill>
                 <a:latin typeface="Amiri" pitchFamily="2" charset="-78"/>
+                <a:ea typeface="Amiri" pitchFamily="2" charset="-78"/>
                 <a:cs typeface="Amiri" pitchFamily="2" charset="-78"/>
               </a:rPr>
               <a:t>يُمَارِسُ</a:t>
@@ -34434,6 +34657,7 @@
                   <a:srgbClr val="1B3B6F"/>
                 </a:solidFill>
                 <a:latin typeface="Amiri" pitchFamily="2" charset="-78"/>
+                <a:ea typeface="Amiri" pitchFamily="2" charset="-78"/>
                 <a:cs typeface="Amiri" pitchFamily="2" charset="-78"/>
               </a:rPr>
               <a:t>أَسْتَطِيعُ أَنْ …</a:t>
@@ -34591,6 +34815,7 @@
                   <a:srgbClr val="1B3B6F"/>
                 </a:solidFill>
                 <a:latin typeface="Amiri" pitchFamily="2" charset="-78"/>
+                <a:ea typeface="Amiri" pitchFamily="2" charset="-78"/>
                 <a:cs typeface="Amiri" pitchFamily="2" charset="-78"/>
               </a:rPr>
               <a:t>لَا أَسْتَطِيعُ</a:t>
@@ -34694,6 +34919,7 @@
                   <a:srgbClr val="1B3B6F"/>
                 </a:solidFill>
                 <a:latin typeface="Amiri" pitchFamily="2" charset="-78"/>
+                <a:ea typeface="Amiri" pitchFamily="2" charset="-78"/>
                 <a:cs typeface="Amiri" pitchFamily="2" charset="-78"/>
               </a:rPr>
               <a:t>تَسْتَطِيعُ</a:t>
@@ -34797,6 +35023,7 @@
                   <a:srgbClr val="1B3B6F"/>
                 </a:solidFill>
                 <a:latin typeface="Amiri" pitchFamily="2" charset="-78"/>
+                <a:ea typeface="Amiri" pitchFamily="2" charset="-78"/>
                 <a:cs typeface="Amiri" pitchFamily="2" charset="-78"/>
               </a:rPr>
               <a:t>يَسْتَطِيعُ</a:t>
@@ -35062,6 +35289,7 @@
                   <a:srgbClr val="1B3B6F"/>
                 </a:solidFill>
                 <a:latin typeface="Amiri" pitchFamily="2" charset="-78"/>
+                <a:ea typeface="Amiri" pitchFamily="2" charset="-78"/>
                 <a:cs typeface="Amiri" pitchFamily="2" charset="-78"/>
               </a:rPr>
               <a:t>أَقْضِي وَقْتِي فِي …</a:t>
@@ -35219,6 +35447,7 @@
                   <a:srgbClr val="1B3B6F"/>
                 </a:solidFill>
                 <a:latin typeface="Amiri" pitchFamily="2" charset="-78"/>
+                <a:ea typeface="Amiri" pitchFamily="2" charset="-78"/>
                 <a:cs typeface="Amiri" pitchFamily="2" charset="-78"/>
               </a:rPr>
               <a:t>نَقْضِي</a:t>
@@ -35322,6 +35551,7 @@
                   <a:srgbClr val="1B3B6F"/>
                 </a:solidFill>
                 <a:latin typeface="Amiri" pitchFamily="2" charset="-78"/>
+                <a:ea typeface="Amiri" pitchFamily="2" charset="-78"/>
                 <a:cs typeface="Amiri" pitchFamily="2" charset="-78"/>
               </a:rPr>
               <a:t>تَقْضِي</a:t>
@@ -35425,6 +35655,7 @@
                   <a:srgbClr val="1B3B6F"/>
                 </a:solidFill>
                 <a:latin typeface="Amiri" pitchFamily="2" charset="-78"/>
+                <a:ea typeface="Amiri" pitchFamily="2" charset="-78"/>
                 <a:cs typeface="Amiri" pitchFamily="2" charset="-78"/>
               </a:rPr>
               <a:t>يَقْضِي</a:t>
@@ -35690,6 +35921,7 @@
                   <a:srgbClr val="1B3B6F"/>
                 </a:solidFill>
                 <a:latin typeface="Amiri" pitchFamily="2" charset="-78"/>
+                <a:ea typeface="Amiri" pitchFamily="2" charset="-78"/>
                 <a:cs typeface="Amiri" pitchFamily="2" charset="-78"/>
               </a:rPr>
               <a:t>القِرَاءَةُ · الرَّسْمُ</a:t>
@@ -35847,6 +36079,7 @@
                   <a:srgbClr val="1B3B6F"/>
                 </a:solidFill>
                 <a:latin typeface="Amiri" pitchFamily="2" charset="-78"/>
+                <a:ea typeface="Amiri" pitchFamily="2" charset="-78"/>
                 <a:cs typeface="Amiri" pitchFamily="2" charset="-78"/>
               </a:rPr>
               <a:t>أَرْسُمُ</a:t>
@@ -35950,6 +36183,7 @@
                   <a:srgbClr val="1B3B6F"/>
                 </a:solidFill>
                 <a:latin typeface="Amiri" pitchFamily="2" charset="-78"/>
+                <a:ea typeface="Amiri" pitchFamily="2" charset="-78"/>
                 <a:cs typeface="Amiri" pitchFamily="2" charset="-78"/>
               </a:rPr>
               <a:t>أَقْرَأُ</a:t>
@@ -36215,6 +36449,7 @@
                   <a:srgbClr val="1B3B6F"/>
                 </a:solidFill>
                 <a:latin typeface="Amiri" pitchFamily="2" charset="-78"/>
+                <a:ea typeface="Amiri" pitchFamily="2" charset="-78"/>
                 <a:cs typeface="Amiri" pitchFamily="2" charset="-78"/>
               </a:rPr>
               <a:t>السِّبَاحَةُ · الطَّبْخُ</a:t>
@@ -36372,6 +36607,7 @@
                   <a:srgbClr val="1B3B6F"/>
                 </a:solidFill>
                 <a:latin typeface="Amiri" pitchFamily="2" charset="-78"/>
+                <a:ea typeface="Amiri" pitchFamily="2" charset="-78"/>
                 <a:cs typeface="Amiri" pitchFamily="2" charset="-78"/>
               </a:rPr>
               <a:t>أَطْبُخُ</a:t>
@@ -36475,6 +36711,7 @@
                   <a:srgbClr val="1B3B6F"/>
                 </a:solidFill>
                 <a:latin typeface="Amiri" pitchFamily="2" charset="-78"/>
+                <a:ea typeface="Amiri" pitchFamily="2" charset="-78"/>
                 <a:cs typeface="Amiri" pitchFamily="2" charset="-78"/>
               </a:rPr>
               <a:t>أَسْبَحُ</a:t>
@@ -36608,6 +36845,7 @@
                   <a:srgbClr val="D4AF37"/>
                 </a:solidFill>
                 <a:latin typeface="Amiri" pitchFamily="2" charset="-78"/>
+                <a:ea typeface="Amiri" pitchFamily="2" charset="-78"/>
                 <a:cs typeface="Amiri" pitchFamily="2" charset="-78"/>
               </a:rPr>
               <a:t>م</a:t>
@@ -36928,6 +37166,7 @@
                   <a:srgbClr val="8A6D1E"/>
                 </a:solidFill>
                 <a:latin typeface="Amiri" pitchFamily="2" charset="-78"/>
+                <a:ea typeface="Amiri" pitchFamily="2" charset="-78"/>
                 <a:cs typeface="Amiri" pitchFamily="2" charset="-78"/>
               </a:rPr>
               <a:t>كَمْ مَرَّةً؟ وَلِمَاذَا؟</a:t>
@@ -37231,6 +37470,7 @@
                   <a:srgbClr val="1B3B6F"/>
                 </a:solidFill>
                 <a:latin typeface="Amiri" pitchFamily="2" charset="-78"/>
+                <a:ea typeface="Amiri" pitchFamily="2" charset="-78"/>
                 <a:cs typeface="Amiri" pitchFamily="2" charset="-78"/>
               </a:rPr>
               <a:t>هِوَايَةٌ</a:t>
@@ -37388,6 +37628,7 @@
                   <a:srgbClr val="1B3B6F"/>
                 </a:solidFill>
                 <a:latin typeface="Amiri" pitchFamily="2" charset="-78"/>
+                <a:ea typeface="Amiri" pitchFamily="2" charset="-78"/>
                 <a:cs typeface="Amiri" pitchFamily="2" charset="-78"/>
               </a:rPr>
               <a:t>هِوَايَتِي</a:t>
@@ -37491,6 +37732,7 @@
                   <a:srgbClr val="1B3B6F"/>
                 </a:solidFill>
                 <a:latin typeface="Amiri" pitchFamily="2" charset="-78"/>
+                <a:ea typeface="Amiri" pitchFamily="2" charset="-78"/>
                 <a:cs typeface="Amiri" pitchFamily="2" charset="-78"/>
               </a:rPr>
               <a:t>هِوَايَاتٌ</a:t>
@@ -37594,6 +37836,7 @@
                   <a:srgbClr val="1B3B6F"/>
                 </a:solidFill>
                 <a:latin typeface="Amiri" pitchFamily="2" charset="-78"/>
+                <a:ea typeface="Amiri" pitchFamily="2" charset="-78"/>
                 <a:cs typeface="Amiri" pitchFamily="2" charset="-78"/>
               </a:rPr>
               <a:t>هِوَايَةٌ</a:t>
@@ -37859,6 +38102,7 @@
                   <a:srgbClr val="1B3B6F"/>
                 </a:solidFill>
                 <a:latin typeface="Amiri" pitchFamily="2" charset="-78"/>
+                <a:ea typeface="Amiri" pitchFamily="2" charset="-78"/>
                 <a:cs typeface="Amiri" pitchFamily="2" charset="-78"/>
               </a:rPr>
               <a:t>نَادٍ</a:t>
@@ -38016,6 +38260,7 @@
                   <a:srgbClr val="1B3B6F"/>
                 </a:solidFill>
                 <a:latin typeface="Amiri" pitchFamily="2" charset="-78"/>
+                <a:ea typeface="Amiri" pitchFamily="2" charset="-78"/>
                 <a:cs typeface="Amiri" pitchFamily="2" charset="-78"/>
               </a:rPr>
               <a:t>أَنْدِيَةٌ</a:t>
@@ -38119,6 +38364,7 @@
                   <a:srgbClr val="1B3B6F"/>
                 </a:solidFill>
                 <a:latin typeface="Amiri" pitchFamily="2" charset="-78"/>
+                <a:ea typeface="Amiri" pitchFamily="2" charset="-78"/>
                 <a:cs typeface="Amiri" pitchFamily="2" charset="-78"/>
               </a:rPr>
               <a:t>النَّادِي</a:t>
@@ -38384,6 +38630,7 @@
                   <a:srgbClr val="1B3B6F"/>
                 </a:solidFill>
                 <a:latin typeface="Amiri" pitchFamily="2" charset="-78"/>
+                <a:ea typeface="Amiri" pitchFamily="2" charset="-78"/>
                 <a:cs typeface="Amiri" pitchFamily="2" charset="-78"/>
               </a:rPr>
               <a:t>دَائِمًا · غَالِبًا · نَادِرًا</a:t>
@@ -38703,6 +38950,7 @@
                   <a:srgbClr val="1B3B6F"/>
                 </a:solidFill>
                 <a:latin typeface="Amiri" pitchFamily="2" charset="-78"/>
+                <a:ea typeface="Amiri" pitchFamily="2" charset="-78"/>
                 <a:cs typeface="Amiri" pitchFamily="2" charset="-78"/>
               </a:rPr>
               <a:t>مَرَّةً · مَرَّتَيْنِ فِي الأُسْبُوعِ</a:t>
@@ -38860,6 +39108,7 @@
                   <a:srgbClr val="1B3B6F"/>
                 </a:solidFill>
                 <a:latin typeface="Amiri" pitchFamily="2" charset="-78"/>
+                <a:ea typeface="Amiri" pitchFamily="2" charset="-78"/>
                 <a:cs typeface="Amiri" pitchFamily="2" charset="-78"/>
               </a:rPr>
               <a:t>ثَلَاثَ مَرَّاتٍ</a:t>
@@ -39125,6 +39374,7 @@
                   <a:srgbClr val="1B3B6F"/>
                 </a:solidFill>
                 <a:latin typeface="Amiri" pitchFamily="2" charset="-78"/>
+                <a:ea typeface="Amiri" pitchFamily="2" charset="-78"/>
                 <a:cs typeface="Amiri" pitchFamily="2" charset="-78"/>
               </a:rPr>
               <a:t>مُمْتِعٌ · مُفِيدٌ</a:t>
@@ -39282,6 +39532,7 @@
                   <a:srgbClr val="1B3B6F"/>
                 </a:solidFill>
                 <a:latin typeface="Amiri" pitchFamily="2" charset="-78"/>
+                <a:ea typeface="Amiri" pitchFamily="2" charset="-78"/>
                 <a:cs typeface="Amiri" pitchFamily="2" charset="-78"/>
               </a:rPr>
               <a:t>أَمْتَعُ</a:t>
@@ -39385,6 +39636,7 @@
                   <a:srgbClr val="1B3B6F"/>
                 </a:solidFill>
                 <a:latin typeface="Amiri" pitchFamily="2" charset="-78"/>
+                <a:ea typeface="Amiri" pitchFamily="2" charset="-78"/>
                 <a:cs typeface="Amiri" pitchFamily="2" charset="-78"/>
               </a:rPr>
               <a:t>مُمْتِعَةٌ · مُفِيدَةٌ</a:t>
@@ -39650,6 +39902,7 @@
                   <a:srgbClr val="1B3B6F"/>
                 </a:solidFill>
                 <a:latin typeface="Amiri" pitchFamily="2" charset="-78"/>
+                <a:ea typeface="Amiri" pitchFamily="2" charset="-78"/>
                 <a:cs typeface="Amiri" pitchFamily="2" charset="-78"/>
               </a:rPr>
               <a:t>فَرِيقٌ</a:t>
@@ -39807,6 +40060,7 @@
                   <a:srgbClr val="1B3B6F"/>
                 </a:solidFill>
                 <a:latin typeface="Amiri" pitchFamily="2" charset="-78"/>
+                <a:ea typeface="Amiri" pitchFamily="2" charset="-78"/>
                 <a:cs typeface="Amiri" pitchFamily="2" charset="-78"/>
               </a:rPr>
               <a:t>فَرِيقِي</a:t>
@@ -39910,6 +40164,7 @@
                   <a:srgbClr val="1B3B6F"/>
                 </a:solidFill>
                 <a:latin typeface="Amiri" pitchFamily="2" charset="-78"/>
+                <a:ea typeface="Amiri" pitchFamily="2" charset="-78"/>
                 <a:cs typeface="Amiri" pitchFamily="2" charset="-78"/>
               </a:rPr>
               <a:t>فِرَقٌ</a:t>
@@ -40013,6 +40268,7 @@
                   <a:srgbClr val="1B3B6F"/>
                 </a:solidFill>
                 <a:latin typeface="Amiri" pitchFamily="2" charset="-78"/>
+                <a:ea typeface="Amiri" pitchFamily="2" charset="-78"/>
                 <a:cs typeface="Amiri" pitchFamily="2" charset="-78"/>
               </a:rPr>
               <a:t>فَرِيقٌ</a:t>
@@ -40146,6 +40402,7 @@
                   <a:srgbClr val="D4AF37"/>
                 </a:solidFill>
                 <a:latin typeface="Amiri" pitchFamily="2" charset="-78"/>
+                <a:ea typeface="Amiri" pitchFamily="2" charset="-78"/>
                 <a:cs typeface="Amiri" pitchFamily="2" charset="-78"/>
               </a:rPr>
               <a:t>م</a:t>
@@ -40466,6 +40723,7 @@
                   <a:srgbClr val="8A6D1E"/>
                 </a:solidFill>
                 <a:latin typeface="Amiri" pitchFamily="2" charset="-78"/>
+                <a:ea typeface="Amiri" pitchFamily="2" charset="-78"/>
                 <a:cs typeface="Amiri" pitchFamily="2" charset="-78"/>
               </a:rPr>
               <a:t>فِي الغُرَفِ</a:t>
@@ -41642,6 +41900,7 @@
                   <a:srgbClr val="1B3B6F"/>
                 </a:solidFill>
                 <a:latin typeface="Amiri" pitchFamily="2" charset="-78"/>
+                <a:ea typeface="Amiri" pitchFamily="2" charset="-78"/>
                 <a:cs typeface="Amiri" pitchFamily="2" charset="-78"/>
               </a:rPr>
               <a:t>دَوْرُكَ!</a:t>
@@ -41718,6 +41977,7 @@
                   <a:srgbClr val="1B3B6F"/>
                 </a:solidFill>
                 <a:latin typeface="Amiri" pitchFamily="2" charset="-78"/>
+                <a:ea typeface="Amiri" pitchFamily="2" charset="-78"/>
                 <a:cs typeface="Amiri" pitchFamily="2" charset="-78"/>
               </a:rPr>
               <a:t>أَحْسَنْتَ! / أَحْسَنْتِ!</a:t>
@@ -41794,6 +42054,7 @@
                   <a:srgbClr val="1B3B6F"/>
                 </a:solidFill>
                 <a:latin typeface="Amiri" pitchFamily="2" charset="-78"/>
+                <a:ea typeface="Amiri" pitchFamily="2" charset="-78"/>
                 <a:cs typeface="Amiri" pitchFamily="2" charset="-78"/>
               </a:rPr>
               <a:t>تَكَلَّمْ أَكْثَرَ، مِنْ فَضْلِكَ</a:t>
@@ -41870,6 +42131,7 @@
                   <a:srgbClr val="1B3B6F"/>
                 </a:solidFill>
                 <a:latin typeface="Amiri" pitchFamily="2" charset="-78"/>
+                <a:ea typeface="Amiri" pitchFamily="2" charset="-78"/>
                 <a:cs typeface="Amiri" pitchFamily="2" charset="-78"/>
               </a:rPr>
               <a:t>لِمَاذَا؟</a:t>
@@ -42041,6 +42303,7 @@
                   <a:srgbClr val="D4AF37"/>
                 </a:solidFill>
                 <a:latin typeface="Amiri" pitchFamily="2" charset="-78"/>
+                <a:ea typeface="Amiri" pitchFamily="2" charset="-78"/>
                 <a:cs typeface="Amiri" pitchFamily="2" charset="-78"/>
               </a:rPr>
               <a:t>م</a:t>
@@ -42361,6 +42624,7 @@
                   <a:srgbClr val="8A6D1E"/>
                 </a:solidFill>
                 <a:latin typeface="Amiri" pitchFamily="2" charset="-78"/>
+                <a:ea typeface="Amiri" pitchFamily="2" charset="-78"/>
                 <a:cs typeface="Amiri" pitchFamily="2" charset="-78"/>
               </a:rPr>
               <a:t>فِي المَرْكَزِ الرِّيَاضِيِّ</a:t>
@@ -42641,6 +42905,7 @@
                   <a:srgbClr val="1B3B6F"/>
                 </a:solidFill>
                 <a:latin typeface="Amiri" pitchFamily="2" charset="-78"/>
+                <a:ea typeface="Amiri" pitchFamily="2" charset="-78"/>
                 <a:cs typeface="Amiri" pitchFamily="2" charset="-78"/>
               </a:rPr>
               <a:t>أُرِيدُ أَنْ أُمَارِسَ …</a:t>
@@ -42717,6 +42982,7 @@
                   <a:srgbClr val="1B3B6F"/>
                 </a:solidFill>
                 <a:latin typeface="Amiri" pitchFamily="2" charset="-78"/>
+                <a:ea typeface="Amiri" pitchFamily="2" charset="-78"/>
                 <a:cs typeface="Amiri" pitchFamily="2" charset="-78"/>
               </a:rPr>
               <a:t>أَهْلًا، أَيَّ رِيَاضَةٍ تُرِيدُ أَنْ تُمَارِسَ؟</a:t>
@@ -42885,6 +43151,7 @@
                   <a:srgbClr val="1B3B6F"/>
                 </a:solidFill>
                 <a:latin typeface="Amiri" pitchFamily="2" charset="-78"/>
+                <a:ea typeface="Amiri" pitchFamily="2" charset="-78"/>
                 <a:cs typeface="Amiri" pitchFamily="2" charset="-78"/>
               </a:rPr>
               <a:t>… مَرَّاتٍ / مَرَّتَيْنِ</a:t>
@@ -42961,6 +43228,7 @@
                   <a:srgbClr val="1B3B6F"/>
                 </a:solidFill>
                 <a:latin typeface="Amiri" pitchFamily="2" charset="-78"/>
+                <a:ea typeface="Amiri" pitchFamily="2" charset="-78"/>
                 <a:cs typeface="Amiri" pitchFamily="2" charset="-78"/>
               </a:rPr>
               <a:t>كَمْ مَرَّةً فِي الأُسْبُوعِ؟</a:t>
@@ -43129,6 +43397,7 @@
                   <a:srgbClr val="1B3B6F"/>
                 </a:solidFill>
                 <a:latin typeface="Amiri" pitchFamily="2" charset="-78"/>
+                <a:ea typeface="Amiri" pitchFamily="2" charset="-78"/>
                 <a:cs typeface="Amiri" pitchFamily="2" charset="-78"/>
               </a:rPr>
               <a:t>نَعَمْ، أَسْتَطِيعُ … / لَا، …</a:t>
@@ -43205,6 +43474,7 @@
                   <a:srgbClr val="1B3B6F"/>
                 </a:solidFill>
                 <a:latin typeface="Amiri" pitchFamily="2" charset="-78"/>
+                <a:ea typeface="Amiri" pitchFamily="2" charset="-78"/>
                 <a:cs typeface="Amiri" pitchFamily="2" charset="-78"/>
               </a:rPr>
               <a:t>هَلْ تَسْتَطِيعُ أَنْ تَسْبَحَ جَيِّدًا؟</a:t>
@@ -43373,6 +43643,7 @@
                   <a:srgbClr val="1B3B6F"/>
                 </a:solidFill>
                 <a:latin typeface="Amiri" pitchFamily="2" charset="-78"/>
+                <a:ea typeface="Amiri" pitchFamily="2" charset="-78"/>
                 <a:cs typeface="Amiri" pitchFamily="2" charset="-78"/>
               </a:rPr>
               <a:t>يَوْمَ … فِي السَّاعَةِ …</a:t>
@@ -43449,6 +43720,7 @@
                   <a:srgbClr val="1B3B6F"/>
                 </a:solidFill>
                 <a:latin typeface="Amiri" pitchFamily="2" charset="-78"/>
+                <a:ea typeface="Amiri" pitchFamily="2" charset="-78"/>
                 <a:cs typeface="Amiri" pitchFamily="2" charset="-78"/>
               </a:rPr>
               <a:t>أَيَّ يَوْمٍ يُنَاسِبُكَ؟</a:t>
@@ -43617,6 +43889,7 @@
                   <a:srgbClr val="1B3B6F"/>
                 </a:solidFill>
                 <a:latin typeface="Amiri" pitchFamily="2" charset="-78"/>
+                <a:ea typeface="Amiri" pitchFamily="2" charset="-78"/>
                 <a:cs typeface="Amiri" pitchFamily="2" charset="-78"/>
               </a:rPr>
               <a:t>لِأَنَّهَا …</a:t>
@@ -43693,6 +43966,7 @@
                   <a:srgbClr val="1B3B6F"/>
                 </a:solidFill>
                 <a:latin typeface="Amiri" pitchFamily="2" charset="-78"/>
+                <a:ea typeface="Amiri" pitchFamily="2" charset="-78"/>
                 <a:cs typeface="Amiri" pitchFamily="2" charset="-78"/>
               </a:rPr>
               <a:t>لِمَاذَا تُحِبُّ السِّبَاحَةَ؟</a:t>
@@ -43967,6 +44241,7 @@
                   <a:srgbClr val="D4AF37"/>
                 </a:solidFill>
                 <a:latin typeface="Amiri" pitchFamily="2" charset="-78"/>
+                <a:ea typeface="Amiri" pitchFamily="2" charset="-78"/>
                 <a:cs typeface="Amiri" pitchFamily="2" charset="-78"/>
               </a:rPr>
               <a:t>م</a:t>
@@ -44287,6 +44562,7 @@
                   <a:srgbClr val="8A6D1E"/>
                 </a:solidFill>
                 <a:latin typeface="Amiri" pitchFamily="2" charset="-78"/>
+                <a:ea typeface="Amiri" pitchFamily="2" charset="-78"/>
                 <a:cs typeface="Amiri" pitchFamily="2" charset="-78"/>
               </a:rPr>
               <a:t>هِوَايَةٌ مُشْتَرَكَةٌ</a:t>
@@ -44567,6 +44843,7 @@
                   <a:srgbClr val="1B3B6F"/>
                 </a:solidFill>
                 <a:latin typeface="Amiri" pitchFamily="2" charset="-78"/>
+                <a:ea typeface="Amiri" pitchFamily="2" charset="-78"/>
                 <a:cs typeface="Amiri" pitchFamily="2" charset="-78"/>
               </a:rPr>
               <a:t>أُحِبُّ … وَ…</a:t>
@@ -44643,6 +44920,7 @@
                   <a:srgbClr val="1B3B6F"/>
                 </a:solidFill>
                 <a:latin typeface="Amiri" pitchFamily="2" charset="-78"/>
+                <a:ea typeface="Amiri" pitchFamily="2" charset="-78"/>
                 <a:cs typeface="Amiri" pitchFamily="2" charset="-78"/>
               </a:rPr>
               <a:t>مَاذَا تَفْعَلُ فِي وَقْتِ فَرَاغِكَ؟</a:t>
@@ -44811,6 +45089,7 @@
                   <a:srgbClr val="1B3B6F"/>
                 </a:solidFill>
                 <a:latin typeface="Amiri" pitchFamily="2" charset="-78"/>
+                <a:ea typeface="Amiri" pitchFamily="2" charset="-78"/>
                 <a:cs typeface="Amiri" pitchFamily="2" charset="-78"/>
               </a:rPr>
               <a:t>أَقْرَأُ … لِأَنَّهَا …</a:t>
@@ -44887,6 +45166,7 @@
                   <a:srgbClr val="1B3B6F"/>
                 </a:solidFill>
                 <a:latin typeface="Amiri" pitchFamily="2" charset="-78"/>
+                <a:ea typeface="Amiri" pitchFamily="2" charset="-78"/>
                 <a:cs typeface="Amiri" pitchFamily="2" charset="-78"/>
               </a:rPr>
               <a:t>مَاذَا تَقْرَأُ؟</a:t>
@@ -45055,6 +45335,7 @@
                   <a:srgbClr val="1B3B6F"/>
                 </a:solidFill>
                 <a:latin typeface="Amiri" pitchFamily="2" charset="-78"/>
+                <a:ea typeface="Amiri" pitchFamily="2" charset="-78"/>
                 <a:cs typeface="Amiri" pitchFamily="2" charset="-78"/>
               </a:rPr>
               <a:t>أَيْنَ …؟ وَكَمْ مَرَّةً …؟</a:t>
@@ -45131,6 +45412,7 @@
                   <a:srgbClr val="1B3B6F"/>
                 </a:solidFill>
                 <a:latin typeface="Amiri" pitchFamily="2" charset="-78"/>
+                <a:ea typeface="Amiri" pitchFamily="2" charset="-78"/>
                 <a:cs typeface="Amiri" pitchFamily="2" charset="-78"/>
               </a:rPr>
               <a:t>… أَنَا أُحِبُّ الشِّطْرَنْجَ كَثِيرًا.</a:t>
@@ -45234,6 +45516,7 @@
                   <a:srgbClr val="1B3B6F"/>
                 </a:solidFill>
                 <a:latin typeface="Amiri" pitchFamily="2" charset="-78"/>
+                <a:ea typeface="Amiri" pitchFamily="2" charset="-78"/>
                 <a:cs typeface="Amiri" pitchFamily="2" charset="-78"/>
               </a:rPr>
               <a:t>نَعَمْ، لٰكِنِّي لَا أَسْتَطِيعُ أَنْ …</a:t>
@@ -45310,6 +45593,7 @@
                   <a:srgbClr val="1B3B6F"/>
                 </a:solidFill>
                 <a:latin typeface="Amiri" pitchFamily="2" charset="-78"/>
+                <a:ea typeface="Amiri" pitchFamily="2" charset="-78"/>
                 <a:cs typeface="Amiri" pitchFamily="2" charset="-78"/>
               </a:rPr>
               <a:t>فِي نَادِي المَدْرَسَةِ، يَوْمَ الخَمِيسِ. هَلْ تَأْتِي؟</a:t>
@@ -45413,6 +45697,7 @@
                   <a:srgbClr val="1B3B6F"/>
                 </a:solidFill>
                 <a:latin typeface="Amiri" pitchFamily="2" charset="-78"/>
+                <a:ea typeface="Amiri" pitchFamily="2" charset="-78"/>
                 <a:cs typeface="Amiri" pitchFamily="2" charset="-78"/>
               </a:rPr>
               <a:t>ذَهَبْتُ … / لَعِبْتُ …</a:t>
@@ -45489,6 +45774,7 @@
                   <a:srgbClr val="1B3B6F"/>
                 </a:solidFill>
                 <a:latin typeface="Amiri" pitchFamily="2" charset="-78"/>
+                <a:ea typeface="Amiri" pitchFamily="2" charset="-78"/>
                 <a:cs typeface="Amiri" pitchFamily="2" charset="-78"/>
               </a:rPr>
               <a:t>مَاذَا فَعَلْتَ فِي نِهَايَةِ الأُسْبُوعِ المَاضِي؟</a:t>
@@ -45663,13 +45949,9 @@
     <a:fontScheme name="Office">
       <a:majorFont>
         <a:latin typeface="Calibri Light" panose="020F0302020204030204"/>
-        <a:ea typeface=""/>
-        <a:cs typeface=""/>
-        <a:font script="Jpan" typeface="游ゴシック Light"/>
-        <a:font script="Hang" typeface="맑은 고딕"/>
-        <a:font script="Hans" typeface="等线 Light"/>
-        <a:font script="Hant" typeface="新細明體"/>
-        <a:font script="Arab" typeface="Times New Roman"/>
+        <a:ea typeface="Amiri" pitchFamily="2" charset="-78"/>
+        <a:cs typeface="Amiri" pitchFamily="2" charset="-78"/>
+        <a:font script="Arab" typeface="Amiri"/>
         <a:font script="Hebr" typeface="Times New Roman"/>
         <a:font script="Thai" typeface="Angsana New"/>
         <a:font script="Ethi" typeface="Nyala"/>
@@ -45715,13 +45997,9 @@
       </a:majorFont>
       <a:minorFont>
         <a:latin typeface="Calibri" panose="020F0502020204030204"/>
-        <a:ea typeface=""/>
-        <a:cs typeface=""/>
-        <a:font script="Jpan" typeface="游ゴシック"/>
-        <a:font script="Hang" typeface="맑은 고딕"/>
-        <a:font script="Hans" typeface="等线"/>
-        <a:font script="Hant" typeface="新細明體"/>
-        <a:font script="Arab" typeface="Arial"/>
+        <a:ea typeface="Amiri" pitchFamily="2" charset="-78"/>
+        <a:cs typeface="Amiri" pitchFamily="2" charset="-78"/>
+        <a:font script="Arab" typeface="Amiri"/>
         <a:font script="Hebr" typeface="Arial"/>
         <a:font script="Thai" typeface="Cordia New"/>
         <a:font script="Ethi" typeface="Nyala"/>
